--- a/statistics_07_hypothesis_testing_p_val.pptx
+++ b/statistics_07_hypothesis_testing_p_val.pptx
@@ -5,24 +5,25 @@
     <p:sldMasterId id="2147483659" r:id="rId1"/>
   </p:sldMasterIdLst>
   <p:notesMasterIdLst>
-    <p:notesMasterId r:id="rId17"/>
+    <p:notesMasterId r:id="rId18"/>
   </p:notesMasterIdLst>
   <p:sldIdLst>
     <p:sldId id="316" r:id="rId2"/>
     <p:sldId id="258" r:id="rId3"/>
     <p:sldId id="323" r:id="rId4"/>
     <p:sldId id="320" r:id="rId5"/>
-    <p:sldId id="319" r:id="rId6"/>
-    <p:sldId id="317" r:id="rId7"/>
-    <p:sldId id="318" r:id="rId8"/>
-    <p:sldId id="314" r:id="rId9"/>
-    <p:sldId id="321" r:id="rId10"/>
-    <p:sldId id="313" r:id="rId11"/>
-    <p:sldId id="294" r:id="rId12"/>
-    <p:sldId id="346" r:id="rId13"/>
-    <p:sldId id="256" r:id="rId14"/>
-    <p:sldId id="352" r:id="rId15"/>
-    <p:sldId id="353" r:id="rId16"/>
+    <p:sldId id="354" r:id="rId6"/>
+    <p:sldId id="319" r:id="rId7"/>
+    <p:sldId id="317" r:id="rId8"/>
+    <p:sldId id="318" r:id="rId9"/>
+    <p:sldId id="314" r:id="rId10"/>
+    <p:sldId id="321" r:id="rId11"/>
+    <p:sldId id="313" r:id="rId12"/>
+    <p:sldId id="294" r:id="rId13"/>
+    <p:sldId id="346" r:id="rId14"/>
+    <p:sldId id="256" r:id="rId15"/>
+    <p:sldId id="352" r:id="rId16"/>
+    <p:sldId id="353" r:id="rId17"/>
   </p:sldIdLst>
   <p:sldSz cx="12192000" cy="6858000"/>
   <p:notesSz cx="6858000" cy="9144000"/>
@@ -15402,6 +15403,1180 @@
   <p:cSld>
     <p:spTree>
       <p:nvGrpSpPr>
+        <p:cNvPr id="1" name=""/>
+        <p:cNvGrpSpPr/>
+        <p:nvPr/>
+      </p:nvGrpSpPr>
+      <p:grpSpPr>
+        <a:xfrm>
+          <a:off x="0" y="0"/>
+          <a:ext cx="0" cy="0"/>
+          <a:chOff x="0" y="0"/>
+          <a:chExt cx="0" cy="0"/>
+        </a:xfrm>
+      </p:grpSpPr>
+      <p:sp>
+        <p:nvSpPr>
+          <p:cNvPr id="4" name="Google Shape;130;p18">
+            <a:extLst>
+              <a:ext uri="{FF2B5EF4-FFF2-40B4-BE49-F238E27FC236}">
+                <a16:creationId xmlns:a16="http://schemas.microsoft.com/office/drawing/2014/main" id="{6F73DBF3-377D-DC49-AED2-EC061EC41127}"/>
+              </a:ext>
+            </a:extLst>
+          </p:cNvPr>
+          <p:cNvSpPr txBox="1"/>
+          <p:nvPr/>
+        </p:nvSpPr>
+        <p:spPr>
+          <a:xfrm>
+            <a:off x="0" y="57383"/>
+            <a:ext cx="5913120" cy="6800617"/>
+          </a:xfrm>
+          <a:prstGeom prst="rect">
+            <a:avLst/>
+          </a:prstGeom>
+          <a:noFill/>
+          <a:ln>
+            <a:noFill/>
+          </a:ln>
+        </p:spPr>
+        <p:txBody>
+          <a:bodyPr spcFirstLastPara="1" wrap="square" lIns="91425" tIns="91425" rIns="91425" bIns="91425" anchor="t" anchorCtr="0">
+            <a:noAutofit/>
+          </a:bodyPr>
+          <a:lstStyle/>
+          <a:p>
+            <a:r>
+              <a:rPr lang="en-US" sz="2800" b="1" dirty="0">
+                <a:latin typeface="Calibri"/>
+                <a:ea typeface="Calibri"/>
+                <a:cs typeface="Calibri"/>
+                <a:sym typeface="Calibri"/>
+              </a:rPr>
+              <a:t>Checking whether a coin is fair - t-test</a:t>
+            </a:r>
+            <a:br>
+              <a:rPr lang="en-US" sz="1800" dirty="0">
+                <a:latin typeface="Calibri"/>
+                <a:ea typeface="Calibri"/>
+                <a:cs typeface="Calibri"/>
+                <a:sym typeface="Calibri"/>
+              </a:rPr>
+            </a:br>
+            <a:endParaRPr lang="en-US" sz="900" dirty="0">
+              <a:latin typeface="Calibri"/>
+              <a:ea typeface="Calibri"/>
+              <a:cs typeface="Calibri"/>
+              <a:sym typeface="Calibri"/>
+            </a:endParaRPr>
+          </a:p>
+          <a:p>
+            <a:r>
+              <a:rPr lang="en-US" sz="1300" dirty="0">
+                <a:latin typeface="Calibri"/>
+                <a:cs typeface="Calibri"/>
+                <a:sym typeface="Calibri"/>
+              </a:rPr>
+              <a:t>I am not sure if the t-test can be used for coin flipping hypothesis testing.</a:t>
+            </a:r>
+          </a:p>
+          <a:p>
+            <a:endParaRPr lang="en-US" sz="800" dirty="0">
+              <a:latin typeface="Calibri"/>
+              <a:cs typeface="Calibri"/>
+              <a:sym typeface="Calibri"/>
+            </a:endParaRPr>
+          </a:p>
+          <a:p>
+            <a:r>
+              <a:rPr lang="en-US" sz="1300" dirty="0">
+                <a:latin typeface="Calibri"/>
+                <a:cs typeface="Calibri"/>
+                <a:sym typeface="Calibri"/>
+              </a:rPr>
+              <a:t>t-test is used for data which is presumed to have normal distribution, and only for small samples of data ( &lt; 30 points).</a:t>
+            </a:r>
+          </a:p>
+          <a:p>
+            <a:endParaRPr lang="en-US" sz="800" dirty="0">
+              <a:latin typeface="Calibri"/>
+              <a:cs typeface="Calibri"/>
+              <a:sym typeface="Calibri"/>
+            </a:endParaRPr>
+          </a:p>
+          <a:p>
+            <a:r>
+              <a:rPr lang="en-US" sz="1300" dirty="0">
+                <a:latin typeface="Calibri"/>
+                <a:cs typeface="Calibri"/>
+                <a:sym typeface="Calibri"/>
+              </a:rPr>
+              <a:t>But here is formal application of t-test:</a:t>
+            </a:r>
+          </a:p>
+          <a:p>
+            <a:endParaRPr lang="en-US" sz="800" dirty="0">
+              <a:latin typeface="Calibri"/>
+              <a:cs typeface="Calibri"/>
+              <a:sym typeface="Calibri"/>
+            </a:endParaRPr>
+          </a:p>
+          <a:p>
+            <a:r>
+              <a:rPr lang="en-US" sz="1300" b="1" u="sng" dirty="0">
+                <a:latin typeface="Calibri"/>
+                <a:ea typeface="Calibri"/>
+                <a:cs typeface="Calibri"/>
+                <a:sym typeface="Calibri"/>
+              </a:rPr>
+              <a:t>Problem:</a:t>
+            </a:r>
+            <a:endParaRPr sz="1300" b="1" u="sng" dirty="0">
+              <a:latin typeface="Calibri"/>
+              <a:ea typeface="Calibri"/>
+              <a:cs typeface="Calibri"/>
+              <a:sym typeface="Calibri"/>
+            </a:endParaRPr>
+          </a:p>
+          <a:p>
+            <a:pPr marL="0" lvl="0" indent="0" algn="l" rtl="0">
+              <a:spcBef>
+                <a:spcPts val="0"/>
+              </a:spcBef>
+              <a:spcAft>
+                <a:spcPts val="0"/>
+              </a:spcAft>
+              <a:buNone/>
+            </a:pPr>
+            <a:r>
+              <a:rPr lang="en-US" sz="1300" dirty="0">
+                <a:latin typeface="Calibri"/>
+                <a:ea typeface="Calibri"/>
+                <a:cs typeface="Calibri"/>
+                <a:sym typeface="Calibri"/>
+              </a:rPr>
+              <a:t>We want to test a null hypothesis that the coin is fair.</a:t>
+            </a:r>
+          </a:p>
+          <a:p>
+            <a:pPr marL="0" lvl="0" indent="0" algn="l" rtl="0">
+              <a:spcBef>
+                <a:spcPts val="0"/>
+              </a:spcBef>
+              <a:spcAft>
+                <a:spcPts val="0"/>
+              </a:spcAft>
+              <a:buNone/>
+            </a:pPr>
+            <a:r>
+              <a:rPr lang="en-US" sz="1300" dirty="0">
+                <a:latin typeface="Calibri"/>
+                <a:ea typeface="Calibri"/>
+                <a:cs typeface="Calibri"/>
+                <a:sym typeface="Calibri"/>
+              </a:rPr>
+              <a:t>We flip the coin N times and got H heads.</a:t>
+            </a:r>
+          </a:p>
+          <a:p>
+            <a:pPr marL="0" lvl="0" indent="0" algn="l" rtl="0">
+              <a:spcBef>
+                <a:spcPts val="0"/>
+              </a:spcBef>
+              <a:spcAft>
+                <a:spcPts val="0"/>
+              </a:spcAft>
+              <a:buNone/>
+            </a:pPr>
+            <a:r>
+              <a:rPr lang="en-US" sz="1300" dirty="0">
+                <a:latin typeface="Calibri"/>
+                <a:ea typeface="Calibri"/>
+                <a:cs typeface="Calibri"/>
+                <a:sym typeface="Calibri"/>
+              </a:rPr>
+              <a:t>So number of observed tails T = N-H.</a:t>
+            </a:r>
+          </a:p>
+          <a:p>
+            <a:pPr marL="0" lvl="0" indent="0" algn="l" rtl="0">
+              <a:spcBef>
+                <a:spcPts val="0"/>
+              </a:spcBef>
+              <a:spcAft>
+                <a:spcPts val="0"/>
+              </a:spcAft>
+              <a:buNone/>
+            </a:pPr>
+            <a:r>
+              <a:rPr lang="en-US" sz="1300" dirty="0">
+                <a:latin typeface="Calibri"/>
+                <a:ea typeface="Calibri"/>
+                <a:cs typeface="Calibri"/>
+                <a:sym typeface="Calibri"/>
+              </a:rPr>
+              <a:t>Expected numbers are N/2 for heads and for tails.</a:t>
+            </a:r>
+          </a:p>
+          <a:p>
+            <a:pPr marL="0" lvl="0" indent="0" algn="l" rtl="0">
+              <a:spcBef>
+                <a:spcPts val="0"/>
+              </a:spcBef>
+              <a:spcAft>
+                <a:spcPts val="0"/>
+              </a:spcAft>
+              <a:buNone/>
+            </a:pPr>
+            <a:endParaRPr lang="en-US" sz="800" dirty="0">
+              <a:latin typeface="Calibri"/>
+              <a:ea typeface="Calibri"/>
+              <a:cs typeface="Calibri"/>
+              <a:sym typeface="Calibri"/>
+            </a:endParaRPr>
+          </a:p>
+          <a:p>
+            <a:pPr marL="0" lvl="0" indent="0" algn="l" rtl="0">
+              <a:spcBef>
+                <a:spcPts val="0"/>
+              </a:spcBef>
+              <a:spcAft>
+                <a:spcPts val="0"/>
+              </a:spcAft>
+              <a:buNone/>
+            </a:pPr>
+            <a:r>
+              <a:rPr lang="en-US" sz="1300" dirty="0">
+                <a:latin typeface="Calibri"/>
+                <a:ea typeface="Calibri"/>
+                <a:cs typeface="Calibri"/>
+                <a:sym typeface="Calibri"/>
+              </a:rPr>
+              <a:t>To calculate t-test we assume values 1 for heads and -1 for tails.</a:t>
+            </a:r>
+          </a:p>
+          <a:p>
+            <a:pPr lvl="0"/>
+            <a:r>
+              <a:rPr lang="en-US" sz="1300" dirty="0">
+                <a:latin typeface="Calibri"/>
+                <a:ea typeface="Calibri"/>
+                <a:cs typeface="Calibri"/>
+                <a:sym typeface="Calibri"/>
+              </a:rPr>
+              <a:t>Then suppose N=100, H=60, T=40</a:t>
+            </a:r>
+          </a:p>
+          <a:p>
+            <a:pPr marL="0" lvl="0" indent="0" algn="l" rtl="0">
+              <a:spcBef>
+                <a:spcPts val="0"/>
+              </a:spcBef>
+              <a:spcAft>
+                <a:spcPts val="0"/>
+              </a:spcAft>
+              <a:buNone/>
+            </a:pPr>
+            <a:r>
+              <a:rPr lang="en-US" sz="1300" dirty="0">
+                <a:latin typeface="Calibri"/>
+                <a:ea typeface="Calibri"/>
+                <a:cs typeface="Calibri"/>
+                <a:sym typeface="Calibri"/>
+              </a:rPr>
+              <a:t>   Sample Mean X = (H – T)/100 = 20/100 = 0.2</a:t>
+            </a:r>
+          </a:p>
+          <a:p>
+            <a:pPr marL="0" lvl="0" indent="0" algn="l" rtl="0">
+              <a:spcBef>
+                <a:spcPts val="0"/>
+              </a:spcBef>
+              <a:spcAft>
+                <a:spcPts val="0"/>
+              </a:spcAft>
+              <a:buNone/>
+            </a:pPr>
+            <a:r>
+              <a:rPr lang="en-US" sz="1300" dirty="0">
+                <a:latin typeface="Calibri"/>
+                <a:ea typeface="Calibri"/>
+                <a:cs typeface="Calibri"/>
+                <a:sym typeface="Calibri"/>
+              </a:rPr>
+              <a:t>   Expected mean = N/2 – N/2 = 0</a:t>
+            </a:r>
+          </a:p>
+          <a:p>
+            <a:pPr marL="0" lvl="0" indent="0" algn="l" rtl="0">
+              <a:spcBef>
+                <a:spcPts val="0"/>
+              </a:spcBef>
+              <a:spcAft>
+                <a:spcPts val="0"/>
+              </a:spcAft>
+              <a:buNone/>
+            </a:pPr>
+            <a:r>
+              <a:rPr lang="en-US" sz="1300" dirty="0">
+                <a:latin typeface="Calibri"/>
+                <a:ea typeface="Calibri"/>
+                <a:cs typeface="Calibri"/>
+                <a:sym typeface="Calibri"/>
+              </a:rPr>
+              <a:t>   Degrees of Freedom = N-1 = 99</a:t>
+            </a:r>
+          </a:p>
+          <a:p>
+            <a:pPr marL="0" lvl="0" indent="0" algn="l" rtl="0">
+              <a:spcBef>
+                <a:spcPts val="0"/>
+              </a:spcBef>
+              <a:spcAft>
+                <a:spcPts val="0"/>
+              </a:spcAft>
+              <a:buNone/>
+            </a:pPr>
+            <a:r>
+              <a:rPr lang="en-US" sz="1300" dirty="0">
+                <a:latin typeface="Calibri"/>
+                <a:ea typeface="Calibri"/>
+                <a:cs typeface="Calibri"/>
+                <a:sym typeface="Calibri"/>
+              </a:rPr>
+              <a:t>   Sample Variance:</a:t>
+            </a:r>
+          </a:p>
+          <a:p>
+            <a:pPr lvl="0"/>
+            <a:r>
+              <a:rPr lang="en-US" sz="1300" dirty="0">
+                <a:latin typeface="Calibri"/>
+                <a:ea typeface="Calibri"/>
+                <a:cs typeface="Calibri"/>
+                <a:sym typeface="Calibri"/>
+              </a:rPr>
+              <a:t>         S</a:t>
+            </a:r>
+            <a:r>
+              <a:rPr lang="en-US" sz="1300" baseline="30000" dirty="0">
+                <a:latin typeface="Calibri"/>
+                <a:ea typeface="Calibri"/>
+                <a:cs typeface="Calibri"/>
+                <a:sym typeface="Calibri"/>
+              </a:rPr>
+              <a:t>2</a:t>
+            </a:r>
+            <a:r>
+              <a:rPr lang="en-US" sz="1300" dirty="0">
+                <a:latin typeface="Calibri"/>
+                <a:ea typeface="Calibri"/>
+                <a:cs typeface="Calibri"/>
+                <a:sym typeface="Calibri"/>
+              </a:rPr>
+              <a:t> = (1/99) *  ( 60*(1-0.2)</a:t>
+            </a:r>
+            <a:r>
+              <a:rPr lang="en-US" sz="1300" baseline="30000" dirty="0">
+                <a:latin typeface="Calibri"/>
+                <a:ea typeface="Calibri"/>
+                <a:cs typeface="Calibri"/>
+                <a:sym typeface="Calibri"/>
+              </a:rPr>
+              <a:t>2</a:t>
+            </a:r>
+            <a:r>
+              <a:rPr lang="en-US" sz="1300" dirty="0">
+                <a:latin typeface="Calibri"/>
+                <a:ea typeface="Calibri"/>
+                <a:cs typeface="Calibri"/>
+                <a:sym typeface="Calibri"/>
+              </a:rPr>
+              <a:t> + 40*(-1-0.2)</a:t>
+            </a:r>
+            <a:r>
+              <a:rPr lang="en-US" sz="1300" baseline="30000" dirty="0">
+                <a:latin typeface="Calibri"/>
+                <a:ea typeface="Calibri"/>
+                <a:cs typeface="Calibri"/>
+                <a:sym typeface="Calibri"/>
+              </a:rPr>
+              <a:t>2</a:t>
+            </a:r>
+            <a:r>
+              <a:rPr lang="en-US" sz="1300" dirty="0">
+                <a:latin typeface="Calibri"/>
+                <a:ea typeface="Calibri"/>
+                <a:cs typeface="Calibri"/>
+                <a:sym typeface="Calibri"/>
+              </a:rPr>
+              <a:t> )  = 0.969</a:t>
+            </a:r>
+          </a:p>
+          <a:p>
+            <a:pPr lvl="0"/>
+            <a:r>
+              <a:rPr lang="en-US" sz="1300" dirty="0">
+                <a:latin typeface="Calibri"/>
+                <a:ea typeface="Calibri"/>
+                <a:cs typeface="Calibri"/>
+                <a:sym typeface="Calibri"/>
+              </a:rPr>
+              <a:t>   Sample Standard Deviation:</a:t>
+            </a:r>
+          </a:p>
+          <a:p>
+            <a:pPr lvl="0"/>
+            <a:r>
+              <a:rPr lang="en-US" sz="1300" dirty="0">
+                <a:latin typeface="Calibri"/>
+                <a:ea typeface="Calibri"/>
+                <a:cs typeface="Calibri"/>
+                <a:sym typeface="Calibri"/>
+              </a:rPr>
+              <a:t>        S = sqrt(0.9696) = 0.9847</a:t>
+            </a:r>
+          </a:p>
+          <a:p>
+            <a:pPr lvl="0"/>
+            <a:r>
+              <a:rPr lang="en-US" sz="1300" dirty="0">
+                <a:latin typeface="Calibri"/>
+                <a:ea typeface="Calibri"/>
+                <a:cs typeface="Calibri"/>
+                <a:sym typeface="Calibri"/>
+              </a:rPr>
+              <a:t>   t-statistics:</a:t>
+            </a:r>
+          </a:p>
+          <a:p>
+            <a:pPr lvl="0"/>
+            <a:r>
+              <a:rPr lang="en-US" sz="1300" dirty="0">
+                <a:latin typeface="Calibri"/>
+                <a:ea typeface="Calibri"/>
+                <a:cs typeface="Calibri"/>
+                <a:sym typeface="Calibri"/>
+              </a:rPr>
+              <a:t>        (0.2– 0) / (0.9847 / 10) = 2.031</a:t>
+            </a:r>
+          </a:p>
+          <a:p>
+            <a:pPr lvl="0"/>
+            <a:endParaRPr lang="en-US" sz="1300" dirty="0">
+              <a:latin typeface="Calibri"/>
+              <a:ea typeface="Calibri"/>
+              <a:cs typeface="Calibri"/>
+              <a:sym typeface="Calibri"/>
+            </a:endParaRPr>
+          </a:p>
+          <a:p>
+            <a:pPr lvl="0"/>
+            <a:r>
+              <a:rPr lang="en-US" sz="1300" dirty="0">
+                <a:latin typeface="Calibri"/>
+                <a:ea typeface="Calibri"/>
+                <a:cs typeface="Calibri"/>
+                <a:sym typeface="Calibri"/>
+              </a:rPr>
+              <a:t>Note: for two-sided t-test with 100 degrees of freedom and P-value 0.05</a:t>
+            </a:r>
+          </a:p>
+          <a:p>
+            <a:pPr lvl="0"/>
+            <a:r>
+              <a:rPr lang="en-US" sz="1300" dirty="0">
+                <a:latin typeface="Calibri"/>
+                <a:ea typeface="Calibri"/>
+                <a:cs typeface="Calibri"/>
+                <a:sym typeface="Calibri"/>
+              </a:rPr>
+              <a:t>we have (from t-test table): 1.984</a:t>
+            </a:r>
+          </a:p>
+          <a:p>
+            <a:pPr lvl="0"/>
+            <a:r>
+              <a:rPr lang="en-US" sz="1300" dirty="0">
+                <a:latin typeface="Calibri"/>
+                <a:ea typeface="Calibri"/>
+                <a:cs typeface="Calibri"/>
+                <a:sym typeface="Calibri"/>
+              </a:rPr>
+              <a:t>Our t-statistics is 2.031, it is more extreme, so we reject the null hypothesis</a:t>
+            </a:r>
+          </a:p>
+          <a:p>
+            <a:pPr lvl="0"/>
+            <a:endParaRPr lang="en-US" sz="1300" dirty="0">
+              <a:latin typeface="Calibri"/>
+              <a:ea typeface="Calibri"/>
+              <a:cs typeface="Calibri"/>
+              <a:sym typeface="Calibri"/>
+            </a:endParaRPr>
+          </a:p>
+          <a:p>
+            <a:pPr lvl="0"/>
+            <a:r>
+              <a:rPr lang="en-US" sz="1300" dirty="0">
+                <a:latin typeface="Calibri"/>
+                <a:ea typeface="Calibri"/>
+                <a:cs typeface="Calibri"/>
+                <a:sym typeface="Calibri"/>
+              </a:rPr>
+              <a:t>In Python:</a:t>
+            </a:r>
+          </a:p>
+          <a:p>
+            <a:pPr lvl="0"/>
+            <a:r>
+              <a:rPr lang="en-US" sz="1100" dirty="0">
+                <a:solidFill>
+                  <a:srgbClr val="0070C0"/>
+                </a:solidFill>
+                <a:latin typeface="Menlo" panose="020B0609030804020204" pitchFamily="49" charset="0"/>
+                <a:ea typeface="Menlo" panose="020B0609030804020204" pitchFamily="49" charset="0"/>
+                <a:cs typeface="Menlo" panose="020B0609030804020204" pitchFamily="49" charset="0"/>
+                <a:sym typeface="Calibri"/>
+              </a:rPr>
+              <a:t>     from </a:t>
+            </a:r>
+            <a:r>
+              <a:rPr lang="en-US" sz="1100" dirty="0" err="1">
+                <a:solidFill>
+                  <a:srgbClr val="0070C0"/>
+                </a:solidFill>
+                <a:latin typeface="Menlo" panose="020B0609030804020204" pitchFamily="49" charset="0"/>
+                <a:ea typeface="Menlo" panose="020B0609030804020204" pitchFamily="49" charset="0"/>
+                <a:cs typeface="Menlo" panose="020B0609030804020204" pitchFamily="49" charset="0"/>
+                <a:sym typeface="Calibri"/>
+              </a:rPr>
+              <a:t>scipy</a:t>
+            </a:r>
+            <a:r>
+              <a:rPr lang="en-US" sz="1100" dirty="0">
+                <a:solidFill>
+                  <a:srgbClr val="0070C0"/>
+                </a:solidFill>
+                <a:latin typeface="Menlo" panose="020B0609030804020204" pitchFamily="49" charset="0"/>
+                <a:ea typeface="Menlo" panose="020B0609030804020204" pitchFamily="49" charset="0"/>
+                <a:cs typeface="Menlo" panose="020B0609030804020204" pitchFamily="49" charset="0"/>
+                <a:sym typeface="Calibri"/>
+              </a:rPr>
+              <a:t> import stats</a:t>
+            </a:r>
+          </a:p>
+          <a:p>
+            <a:pPr lvl="0"/>
+            <a:r>
+              <a:rPr lang="en-US" sz="1100" dirty="0">
+                <a:solidFill>
+                  <a:srgbClr val="0070C0"/>
+                </a:solidFill>
+                <a:latin typeface="Menlo" panose="020B0609030804020204" pitchFamily="49" charset="0"/>
+                <a:ea typeface="Menlo" panose="020B0609030804020204" pitchFamily="49" charset="0"/>
+                <a:cs typeface="Menlo" panose="020B0609030804020204" pitchFamily="49" charset="0"/>
+                <a:sym typeface="Calibri"/>
+              </a:rPr>
+              <a:t>     </a:t>
+            </a:r>
+            <a:r>
+              <a:rPr lang="en-US" sz="1100" dirty="0" err="1">
+                <a:solidFill>
+                  <a:srgbClr val="0070C0"/>
+                </a:solidFill>
+                <a:latin typeface="Menlo" panose="020B0609030804020204" pitchFamily="49" charset="0"/>
+                <a:ea typeface="Menlo" panose="020B0609030804020204" pitchFamily="49" charset="0"/>
+                <a:cs typeface="Menlo" panose="020B0609030804020204" pitchFamily="49" charset="0"/>
+                <a:sym typeface="Calibri"/>
+              </a:rPr>
+              <a:t>stats.t.cdf</a:t>
+            </a:r>
+            <a:r>
+              <a:rPr lang="en-US" sz="1100" dirty="0">
+                <a:solidFill>
+                  <a:srgbClr val="0070C0"/>
+                </a:solidFill>
+                <a:latin typeface="Menlo" panose="020B0609030804020204" pitchFamily="49" charset="0"/>
+                <a:ea typeface="Menlo" panose="020B0609030804020204" pitchFamily="49" charset="0"/>
+                <a:cs typeface="Menlo" panose="020B0609030804020204" pitchFamily="49" charset="0"/>
+                <a:sym typeface="Calibri"/>
+              </a:rPr>
+              <a:t>(2.031,df=99)    </a:t>
+            </a:r>
+            <a:r>
+              <a:rPr lang="en-US" sz="1100" dirty="0">
+                <a:solidFill>
+                  <a:srgbClr val="00B050"/>
+                </a:solidFill>
+                <a:latin typeface="Menlo" panose="020B0609030804020204" pitchFamily="49" charset="0"/>
+                <a:ea typeface="Menlo" panose="020B0609030804020204" pitchFamily="49" charset="0"/>
+                <a:cs typeface="Menlo" panose="020B0609030804020204" pitchFamily="49" charset="0"/>
+                <a:sym typeface="Calibri"/>
+              </a:rPr>
+              <a:t># 0.9775 , more extreme than 0.95</a:t>
+            </a:r>
+          </a:p>
+          <a:p>
+            <a:pPr lvl="0"/>
+            <a:endParaRPr lang="en-US" sz="1300" dirty="0">
+              <a:latin typeface="Calibri"/>
+              <a:ea typeface="Calibri"/>
+              <a:cs typeface="Calibri"/>
+              <a:sym typeface="Calibri"/>
+            </a:endParaRPr>
+          </a:p>
+          <a:p>
+            <a:pPr lvl="0"/>
+            <a:endParaRPr lang="en-US" sz="1300" dirty="0">
+              <a:latin typeface="Calibri"/>
+              <a:ea typeface="Calibri"/>
+              <a:cs typeface="Calibri"/>
+              <a:sym typeface="Calibri"/>
+            </a:endParaRPr>
+          </a:p>
+          <a:p>
+            <a:pPr lvl="0"/>
+            <a:endParaRPr lang="en-US" sz="1300" dirty="0">
+              <a:latin typeface="Calibri"/>
+              <a:ea typeface="Calibri"/>
+              <a:cs typeface="Calibri"/>
+              <a:sym typeface="Calibri"/>
+            </a:endParaRPr>
+          </a:p>
+          <a:p>
+            <a:pPr lvl="0"/>
+            <a:endParaRPr lang="en-US" sz="1300" dirty="0">
+              <a:latin typeface="Calibri"/>
+              <a:ea typeface="Calibri"/>
+              <a:cs typeface="Calibri"/>
+              <a:sym typeface="Calibri"/>
+            </a:endParaRPr>
+          </a:p>
+        </p:txBody>
+      </p:sp>
+      <p:pic>
+        <p:nvPicPr>
+          <p:cNvPr id="5" name="Picture 4">
+            <a:extLst>
+              <a:ext uri="{FF2B5EF4-FFF2-40B4-BE49-F238E27FC236}">
+                <a16:creationId xmlns:a16="http://schemas.microsoft.com/office/drawing/2014/main" id="{9CC5F72C-4AE0-DE4C-A88E-C5CDCB8F2FE7}"/>
+              </a:ext>
+            </a:extLst>
+          </p:cNvPr>
+          <p:cNvPicPr>
+            <a:picLocks noChangeAspect="1"/>
+          </p:cNvPicPr>
+          <p:nvPr/>
+        </p:nvPicPr>
+        <p:blipFill>
+          <a:blip r:embed="rId2" cstate="email">
+            <a:extLst>
+              <a:ext uri="{28A0092B-C50C-407E-A947-70E740481C1C}">
+                <a14:useLocalDpi xmlns:a14="http://schemas.microsoft.com/office/drawing/2010/main"/>
+              </a:ext>
+            </a:extLst>
+          </a:blip>
+          <a:stretch>
+            <a:fillRect/>
+          </a:stretch>
+        </p:blipFill>
+        <p:spPr>
+          <a:xfrm>
+            <a:off x="7122758" y="1496340"/>
+            <a:ext cx="1331161" cy="612140"/>
+          </a:xfrm>
+          <a:prstGeom prst="rect">
+            <a:avLst/>
+          </a:prstGeom>
+        </p:spPr>
+      </p:pic>
+      <p:pic>
+        <p:nvPicPr>
+          <p:cNvPr id="6" name="Picture 5">
+            <a:extLst>
+              <a:ext uri="{FF2B5EF4-FFF2-40B4-BE49-F238E27FC236}">
+                <a16:creationId xmlns:a16="http://schemas.microsoft.com/office/drawing/2014/main" id="{98E620A2-33F1-234A-BB97-467B69CD2327}"/>
+              </a:ext>
+            </a:extLst>
+          </p:cNvPr>
+          <p:cNvPicPr>
+            <a:picLocks noChangeAspect="1"/>
+          </p:cNvPicPr>
+          <p:nvPr/>
+        </p:nvPicPr>
+        <p:blipFill>
+          <a:blip r:embed="rId3" cstate="email">
+            <a:extLst>
+              <a:ext uri="{28A0092B-C50C-407E-A947-70E740481C1C}">
+                <a14:useLocalDpi xmlns:a14="http://schemas.microsoft.com/office/drawing/2010/main"/>
+              </a:ext>
+            </a:extLst>
+          </a:blip>
+          <a:stretch>
+            <a:fillRect/>
+          </a:stretch>
+        </p:blipFill>
+        <p:spPr>
+          <a:xfrm>
+            <a:off x="7122758" y="2148781"/>
+            <a:ext cx="2377908" cy="613968"/>
+          </a:xfrm>
+          <a:prstGeom prst="rect">
+            <a:avLst/>
+          </a:prstGeom>
+        </p:spPr>
+      </p:pic>
+      <p:pic>
+        <p:nvPicPr>
+          <p:cNvPr id="7" name="Picture 6">
+            <a:extLst>
+              <a:ext uri="{FF2B5EF4-FFF2-40B4-BE49-F238E27FC236}">
+                <a16:creationId xmlns:a16="http://schemas.microsoft.com/office/drawing/2014/main" id="{699F40AF-8B1F-4B4C-AB25-DBEF1CC15EB6}"/>
+              </a:ext>
+            </a:extLst>
+          </p:cNvPr>
+          <p:cNvPicPr>
+            <a:picLocks noChangeAspect="1"/>
+          </p:cNvPicPr>
+          <p:nvPr/>
+        </p:nvPicPr>
+        <p:blipFill>
+          <a:blip r:embed="rId4" cstate="email">
+            <a:extLst>
+              <a:ext uri="{28A0092B-C50C-407E-A947-70E740481C1C}">
+                <a14:useLocalDpi xmlns:a14="http://schemas.microsoft.com/office/drawing/2010/main"/>
+              </a:ext>
+            </a:extLst>
+          </a:blip>
+          <a:stretch>
+            <a:fillRect/>
+          </a:stretch>
+        </p:blipFill>
+        <p:spPr>
+          <a:xfrm>
+            <a:off x="7038703" y="3002765"/>
+            <a:ext cx="702080" cy="616692"/>
+          </a:xfrm>
+          <a:prstGeom prst="rect">
+            <a:avLst/>
+          </a:prstGeom>
+        </p:spPr>
+      </p:pic>
+      <p:pic>
+        <p:nvPicPr>
+          <p:cNvPr id="8" name="Picture 7">
+            <a:extLst>
+              <a:ext uri="{FF2B5EF4-FFF2-40B4-BE49-F238E27FC236}">
+                <a16:creationId xmlns:a16="http://schemas.microsoft.com/office/drawing/2014/main" id="{C8597561-A772-964F-AE93-9F1DCADF39F8}"/>
+              </a:ext>
+            </a:extLst>
+          </p:cNvPr>
+          <p:cNvPicPr>
+            <a:picLocks noChangeAspect="1"/>
+          </p:cNvPicPr>
+          <p:nvPr/>
+        </p:nvPicPr>
+        <p:blipFill>
+          <a:blip r:embed="rId5" cstate="email">
+            <a:extLst>
+              <a:ext uri="{28A0092B-C50C-407E-A947-70E740481C1C}">
+                <a14:useLocalDpi xmlns:a14="http://schemas.microsoft.com/office/drawing/2010/main"/>
+              </a:ext>
+            </a:extLst>
+          </a:blip>
+          <a:stretch>
+            <a:fillRect/>
+          </a:stretch>
+        </p:blipFill>
+        <p:spPr>
+          <a:xfrm>
+            <a:off x="7038703" y="3859473"/>
+            <a:ext cx="582886" cy="565991"/>
+          </a:xfrm>
+          <a:prstGeom prst="rect">
+            <a:avLst/>
+          </a:prstGeom>
+        </p:spPr>
+      </p:pic>
+      <p:sp>
+        <p:nvSpPr>
+          <p:cNvPr id="9" name="TextBox 8">
+            <a:extLst>
+              <a:ext uri="{FF2B5EF4-FFF2-40B4-BE49-F238E27FC236}">
+                <a16:creationId xmlns:a16="http://schemas.microsoft.com/office/drawing/2014/main" id="{FE5ECE04-FB56-A541-ADF8-EC1AB9C8DCDC}"/>
+              </a:ext>
+            </a:extLst>
+          </p:cNvPr>
+          <p:cNvSpPr txBox="1"/>
+          <p:nvPr/>
+        </p:nvSpPr>
+        <p:spPr>
+          <a:xfrm>
+            <a:off x="6772928" y="237877"/>
+            <a:ext cx="5318760" cy="1046440"/>
+          </a:xfrm>
+          <a:prstGeom prst="rect">
+            <a:avLst/>
+          </a:prstGeom>
+          <a:noFill/>
+        </p:spPr>
+        <p:txBody>
+          <a:bodyPr wrap="square" rtlCol="0">
+            <a:spAutoFit/>
+          </a:bodyPr>
+          <a:lstStyle/>
+          <a:p>
+            <a:r>
+              <a:rPr lang="en-US" sz="2000" b="1" dirty="0"/>
+              <a:t>Student t-test</a:t>
+            </a:r>
+          </a:p>
+          <a:p>
+            <a:endParaRPr lang="en-US" dirty="0"/>
+          </a:p>
+          <a:p>
+            <a:r>
+              <a:rPr lang="en-US" dirty="0"/>
+              <a:t>Let X</a:t>
+            </a:r>
+            <a:r>
+              <a:rPr lang="en-US" baseline="-25000" dirty="0"/>
+              <a:t>i</a:t>
+            </a:r>
+            <a:r>
+              <a:rPr lang="en-US" dirty="0"/>
+              <a:t> be independently and identically drawn from the normal distribution with expected mean value</a:t>
+            </a:r>
+            <a:r>
+              <a:rPr lang="el-GR" dirty="0"/>
+              <a:t> </a:t>
+            </a:r>
+            <a:r>
+              <a:rPr lang="el-GR" b="1" dirty="0">
+                <a:solidFill>
+                  <a:srgbClr val="0070C0"/>
+                </a:solidFill>
+              </a:rPr>
+              <a:t>μ</a:t>
+            </a:r>
+            <a:r>
+              <a:rPr lang="en-US" dirty="0"/>
+              <a:t> and variance </a:t>
+            </a:r>
+            <a:r>
+              <a:rPr lang="el-GR" b="1" dirty="0">
+                <a:solidFill>
+                  <a:srgbClr val="0070C0"/>
+                </a:solidFill>
+              </a:rPr>
+              <a:t>σ</a:t>
+            </a:r>
+            <a:r>
+              <a:rPr lang="en-US" b="1" baseline="30000" dirty="0">
+                <a:solidFill>
+                  <a:srgbClr val="0070C0"/>
+                </a:solidFill>
+              </a:rPr>
+              <a:t>2</a:t>
+            </a:r>
+            <a:r>
+              <a:rPr lang="en-US" baseline="30000" dirty="0"/>
+              <a:t>  </a:t>
+            </a:r>
+            <a:endParaRPr lang="en-US" dirty="0"/>
+          </a:p>
+        </p:txBody>
+      </p:sp>
+      <p:sp>
+        <p:nvSpPr>
+          <p:cNvPr id="10" name="TextBox 9">
+            <a:extLst>
+              <a:ext uri="{FF2B5EF4-FFF2-40B4-BE49-F238E27FC236}">
+                <a16:creationId xmlns:a16="http://schemas.microsoft.com/office/drawing/2014/main" id="{C2DB4341-286D-CD45-99E7-42A3FF1B137F}"/>
+              </a:ext>
+            </a:extLst>
+          </p:cNvPr>
+          <p:cNvSpPr txBox="1"/>
+          <p:nvPr/>
+        </p:nvSpPr>
+        <p:spPr>
+          <a:xfrm>
+            <a:off x="9580958" y="1639127"/>
+            <a:ext cx="1214439" cy="523220"/>
+          </a:xfrm>
+          <a:prstGeom prst="rect">
+            <a:avLst/>
+          </a:prstGeom>
+          <a:noFill/>
+        </p:spPr>
+        <p:txBody>
+          <a:bodyPr wrap="square" rtlCol="0">
+            <a:spAutoFit/>
+          </a:bodyPr>
+          <a:lstStyle/>
+          <a:p>
+            <a:r>
+              <a:rPr lang="en-US" dirty="0"/>
+              <a:t>----- Sample </a:t>
+            </a:r>
+          </a:p>
+          <a:p>
+            <a:r>
+              <a:rPr lang="en-US" dirty="0"/>
+              <a:t>       mean</a:t>
+            </a:r>
+          </a:p>
+        </p:txBody>
+      </p:sp>
+      <p:sp>
+        <p:nvSpPr>
+          <p:cNvPr id="11" name="TextBox 10">
+            <a:extLst>
+              <a:ext uri="{FF2B5EF4-FFF2-40B4-BE49-F238E27FC236}">
+                <a16:creationId xmlns:a16="http://schemas.microsoft.com/office/drawing/2014/main" id="{8A5616D2-AC16-E540-AFEE-40C460596FA8}"/>
+              </a:ext>
+            </a:extLst>
+          </p:cNvPr>
+          <p:cNvSpPr txBox="1"/>
+          <p:nvPr/>
+        </p:nvSpPr>
+        <p:spPr>
+          <a:xfrm>
+            <a:off x="9580958" y="2244285"/>
+            <a:ext cx="1406529" cy="523220"/>
+          </a:xfrm>
+          <a:prstGeom prst="rect">
+            <a:avLst/>
+          </a:prstGeom>
+          <a:noFill/>
+        </p:spPr>
+        <p:txBody>
+          <a:bodyPr wrap="square" rtlCol="0">
+            <a:spAutoFit/>
+          </a:bodyPr>
+          <a:lstStyle/>
+          <a:p>
+            <a:r>
+              <a:rPr lang="en-US" dirty="0"/>
+              <a:t>----- Sample </a:t>
+            </a:r>
+          </a:p>
+          <a:p>
+            <a:r>
+              <a:rPr lang="en-US" dirty="0"/>
+              <a:t>       variance</a:t>
+            </a:r>
+          </a:p>
+        </p:txBody>
+      </p:sp>
+      <p:sp>
+        <p:nvSpPr>
+          <p:cNvPr id="12" name="TextBox 11">
+            <a:extLst>
+              <a:ext uri="{FF2B5EF4-FFF2-40B4-BE49-F238E27FC236}">
+                <a16:creationId xmlns:a16="http://schemas.microsoft.com/office/drawing/2014/main" id="{9545AB33-AA63-984A-9B99-9845844D5CB7}"/>
+              </a:ext>
+            </a:extLst>
+          </p:cNvPr>
+          <p:cNvSpPr txBox="1"/>
+          <p:nvPr/>
+        </p:nvSpPr>
+        <p:spPr>
+          <a:xfrm>
+            <a:off x="8044844" y="3152313"/>
+            <a:ext cx="2143280" cy="523220"/>
+          </a:xfrm>
+          <a:prstGeom prst="rect">
+            <a:avLst/>
+          </a:prstGeom>
+          <a:noFill/>
+        </p:spPr>
+        <p:txBody>
+          <a:bodyPr wrap="square" rtlCol="0">
+            <a:spAutoFit/>
+          </a:bodyPr>
+          <a:lstStyle/>
+          <a:p>
+            <a:r>
+              <a:rPr lang="en-US" dirty="0"/>
+              <a:t>Random variable, </a:t>
+            </a:r>
+          </a:p>
+          <a:p>
+            <a:r>
+              <a:rPr lang="en-US" dirty="0"/>
+              <a:t>Normal distribution</a:t>
+            </a:r>
+          </a:p>
+        </p:txBody>
+      </p:sp>
+      <p:sp>
+        <p:nvSpPr>
+          <p:cNvPr id="13" name="TextBox 12">
+            <a:extLst>
+              <a:ext uri="{FF2B5EF4-FFF2-40B4-BE49-F238E27FC236}">
+                <a16:creationId xmlns:a16="http://schemas.microsoft.com/office/drawing/2014/main" id="{734ABCDE-E2E0-1C44-A086-B8E907EF2E67}"/>
+              </a:ext>
+            </a:extLst>
+          </p:cNvPr>
+          <p:cNvSpPr txBox="1"/>
+          <p:nvPr/>
+        </p:nvSpPr>
+        <p:spPr>
+          <a:xfrm>
+            <a:off x="8044845" y="3968158"/>
+            <a:ext cx="3757284" cy="1169551"/>
+          </a:xfrm>
+          <a:prstGeom prst="rect">
+            <a:avLst/>
+          </a:prstGeom>
+          <a:noFill/>
+        </p:spPr>
+        <p:txBody>
+          <a:bodyPr wrap="square" rtlCol="0">
+            <a:spAutoFit/>
+          </a:bodyPr>
+          <a:lstStyle/>
+          <a:p>
+            <a:r>
+              <a:rPr lang="en-US" dirty="0"/>
+              <a:t>Random variable, </a:t>
+            </a:r>
+            <a:r>
+              <a:rPr lang="en-US" b="1" dirty="0">
+                <a:solidFill>
+                  <a:srgbClr val="0070C0"/>
+                </a:solidFill>
+              </a:rPr>
+              <a:t>t-distribution</a:t>
+            </a:r>
+            <a:r>
+              <a:rPr lang="en-US" dirty="0"/>
+              <a:t>. </a:t>
+            </a:r>
+          </a:p>
+          <a:p>
+            <a:r>
+              <a:rPr lang="en-US" dirty="0"/>
+              <a:t>It uses S = sqrt(sample variance) because real sigma is unknown. This creates </a:t>
+            </a:r>
+            <a:r>
+              <a:rPr lang="en-US" b="1" dirty="0">
+                <a:solidFill>
+                  <a:srgbClr val="0070C0"/>
+                </a:solidFill>
+              </a:rPr>
+              <a:t>uncertainty</a:t>
+            </a:r>
+            <a:r>
+              <a:rPr lang="en-US" dirty="0"/>
+              <a:t> – and leads to the "</a:t>
+            </a:r>
+            <a:r>
+              <a:rPr lang="en-US" b="1" dirty="0">
+                <a:solidFill>
+                  <a:srgbClr val="0070C0"/>
+                </a:solidFill>
+              </a:rPr>
+              <a:t>fat tails</a:t>
+            </a:r>
+            <a:r>
+              <a:rPr lang="en-US" dirty="0"/>
+              <a:t>" in the t-distribution.</a:t>
+            </a:r>
+          </a:p>
+        </p:txBody>
+      </p:sp>
+      <p:pic>
+        <p:nvPicPr>
+          <p:cNvPr id="16" name="Picture 15">
+            <a:extLst>
+              <a:ext uri="{FF2B5EF4-FFF2-40B4-BE49-F238E27FC236}">
+                <a16:creationId xmlns:a16="http://schemas.microsoft.com/office/drawing/2014/main" id="{731C3EEC-3D2B-4D4C-B8D3-B3908EED7EA1}"/>
+              </a:ext>
+            </a:extLst>
+          </p:cNvPr>
+          <p:cNvPicPr>
+            <a:picLocks noChangeAspect="1"/>
+          </p:cNvPicPr>
+          <p:nvPr/>
+        </p:nvPicPr>
+        <p:blipFill rotWithShape="1">
+          <a:blip r:embed="rId6" cstate="email">
+            <a:extLst>
+              <a:ext uri="{28A0092B-C50C-407E-A947-70E740481C1C}">
+                <a14:useLocalDpi xmlns:a14="http://schemas.microsoft.com/office/drawing/2010/main"/>
+              </a:ext>
+            </a:extLst>
+          </a:blip>
+          <a:srcRect/>
+          <a:stretch/>
+        </p:blipFill>
+        <p:spPr>
+          <a:xfrm>
+            <a:off x="6584085" y="5246893"/>
+            <a:ext cx="5384771" cy="1408156"/>
+          </a:xfrm>
+          <a:prstGeom prst="rect">
+            <a:avLst/>
+          </a:prstGeom>
+        </p:spPr>
+      </p:pic>
+      <p:cxnSp>
+        <p:nvCxnSpPr>
+          <p:cNvPr id="3" name="Straight Connector 2">
+            <a:extLst>
+              <a:ext uri="{FF2B5EF4-FFF2-40B4-BE49-F238E27FC236}">
+                <a16:creationId xmlns:a16="http://schemas.microsoft.com/office/drawing/2014/main" id="{D1C0BEE1-1D4E-454C-B8BD-7721E20060BB}"/>
+              </a:ext>
+            </a:extLst>
+          </p:cNvPr>
+          <p:cNvCxnSpPr/>
+          <p:nvPr/>
+        </p:nvCxnSpPr>
+        <p:spPr>
+          <a:xfrm>
+            <a:off x="6291620" y="237877"/>
+            <a:ext cx="0" cy="6463174"/>
+          </a:xfrm>
+          <a:prstGeom prst="line">
+            <a:avLst/>
+          </a:prstGeom>
+        </p:spPr>
+        <p:style>
+          <a:lnRef idx="1">
+            <a:schemeClr val="accent1"/>
+          </a:lnRef>
+          <a:fillRef idx="0">
+            <a:schemeClr val="accent1"/>
+          </a:fillRef>
+          <a:effectRef idx="0">
+            <a:schemeClr val="accent1"/>
+          </a:effectRef>
+          <a:fontRef idx="minor">
+            <a:schemeClr val="tx1"/>
+          </a:fontRef>
+        </p:style>
+      </p:cxnSp>
+    </p:spTree>
+    <p:extLst>
+      <p:ext uri="{BB962C8B-B14F-4D97-AF65-F5344CB8AC3E}">
+        <p14:creationId xmlns:p14="http://schemas.microsoft.com/office/powerpoint/2010/main" val="3379995339"/>
+      </p:ext>
+    </p:extLst>
+  </p:cSld>
+  <p:clrMapOvr>
+    <a:masterClrMapping/>
+  </p:clrMapOvr>
+</p:sld>
+</file>
+
+<file path=ppt/slides/slide11.xml><?xml version="1.0" encoding="utf-8"?>
+<p:sld xmlns:a="http://schemas.openxmlformats.org/drawingml/2006/main" xmlns:r="http://schemas.openxmlformats.org/officeDocument/2006/relationships" xmlns:p="http://schemas.openxmlformats.org/presentationml/2006/main">
+  <p:cSld>
+    <p:spTree>
+      <p:nvGrpSpPr>
         <p:cNvPr id="1" name="Shape 113"/>
         <p:cNvGrpSpPr/>
         <p:nvPr/>
@@ -16268,7 +17443,7 @@
 </p:sld>
 </file>
 
-<file path=ppt/slides/slide11.xml><?xml version="1.0" encoding="utf-8"?>
+<file path=ppt/slides/slide12.xml><?xml version="1.0" encoding="utf-8"?>
 <p:sld xmlns:a="http://schemas.openxmlformats.org/drawingml/2006/main" xmlns:r="http://schemas.openxmlformats.org/officeDocument/2006/relationships" xmlns:p="http://schemas.openxmlformats.org/presentationml/2006/main">
   <p:cSld>
     <p:spTree>
@@ -16534,7 +17709,7 @@
 </p:sld>
 </file>
 
-<file path=ppt/slides/slide12.xml><?xml version="1.0" encoding="utf-8"?>
+<file path=ppt/slides/slide13.xml><?xml version="1.0" encoding="utf-8"?>
 <p:sld xmlns:a="http://schemas.openxmlformats.org/drawingml/2006/main" xmlns:r="http://schemas.openxmlformats.org/officeDocument/2006/relationships" xmlns:p="http://schemas.openxmlformats.org/presentationml/2006/main">
   <p:cSld>
     <p:spTree>
@@ -17802,7 +18977,7 @@
 </p:sld>
 </file>
 
-<file path=ppt/slides/slide13.xml><?xml version="1.0" encoding="utf-8"?>
+<file path=ppt/slides/slide14.xml><?xml version="1.0" encoding="utf-8"?>
 <p:sld xmlns:a="http://schemas.openxmlformats.org/drawingml/2006/main" xmlns:r="http://schemas.openxmlformats.org/officeDocument/2006/relationships" xmlns:p="http://schemas.openxmlformats.org/presentationml/2006/main">
   <p:cSld>
     <p:spTree>
@@ -18652,7 +19827,7 @@
 </p:sld>
 </file>
 
-<file path=ppt/slides/slide14.xml><?xml version="1.0" encoding="utf-8"?>
+<file path=ppt/slides/slide15.xml><?xml version="1.0" encoding="utf-8"?>
 <p:sld xmlns:a="http://schemas.openxmlformats.org/drawingml/2006/main" xmlns:r="http://schemas.openxmlformats.org/officeDocument/2006/relationships" xmlns:p="http://schemas.openxmlformats.org/presentationml/2006/main">
   <p:cSld>
     <p:spTree>
@@ -18987,7 +20162,7 @@
 </p:sld>
 </file>
 
-<file path=ppt/slides/slide15.xml><?xml version="1.0" encoding="utf-8"?>
+<file path=ppt/slides/slide16.xml><?xml version="1.0" encoding="utf-8"?>
 <p:sld xmlns:a="http://schemas.openxmlformats.org/drawingml/2006/main" xmlns:r="http://schemas.openxmlformats.org/officeDocument/2006/relationships" xmlns:p="http://schemas.openxmlformats.org/presentationml/2006/main">
   <p:cSld>
     <p:spTree>
@@ -22979,6 +24154,339 @@
 </file>
 
 <file path=ppt/slides/slide5.xml><?xml version="1.0" encoding="utf-8"?>
+<p:sld xmlns:a="http://schemas.openxmlformats.org/drawingml/2006/main" xmlns:r="http://schemas.openxmlformats.org/officeDocument/2006/relationships" xmlns:p="http://schemas.openxmlformats.org/presentationml/2006/main">
+  <p:cSld>
+    <p:spTree>
+      <p:nvGrpSpPr>
+        <p:cNvPr id="1" name=""/>
+        <p:cNvGrpSpPr/>
+        <p:nvPr/>
+      </p:nvGrpSpPr>
+      <p:grpSpPr>
+        <a:xfrm>
+          <a:off x="0" y="0"/>
+          <a:ext cx="0" cy="0"/>
+          <a:chOff x="0" y="0"/>
+          <a:chExt cx="0" cy="0"/>
+        </a:xfrm>
+      </p:grpSpPr>
+      <p:sp>
+        <p:nvSpPr>
+          <p:cNvPr id="5" name="Rectangle 4">
+            <a:extLst>
+              <a:ext uri="{FF2B5EF4-FFF2-40B4-BE49-F238E27FC236}">
+                <a16:creationId xmlns:a16="http://schemas.microsoft.com/office/drawing/2014/main" id="{8EAA36F6-8BDB-FF45-8538-E75D74817769}"/>
+              </a:ext>
+            </a:extLst>
+          </p:cNvPr>
+          <p:cNvSpPr/>
+          <p:nvPr/>
+        </p:nvSpPr>
+        <p:spPr>
+          <a:xfrm>
+            <a:off x="0" y="0"/>
+            <a:ext cx="4451860" cy="523220"/>
+          </a:xfrm>
+          <a:prstGeom prst="rect">
+            <a:avLst/>
+          </a:prstGeom>
+        </p:spPr>
+        <p:txBody>
+          <a:bodyPr wrap="none">
+            <a:spAutoFit/>
+          </a:bodyPr>
+          <a:lstStyle/>
+          <a:p>
+            <a:r>
+              <a:rPr lang="en-US" sz="2800" b="1" dirty="0">
+                <a:solidFill>
+                  <a:schemeClr val="dk1"/>
+                </a:solidFill>
+                <a:latin typeface="Calibri"/>
+                <a:ea typeface="Calibri"/>
+                <a:cs typeface="Calibri"/>
+                <a:sym typeface="Calibri"/>
+              </a:rPr>
+              <a:t>Direct Calculation of P-Value</a:t>
+            </a:r>
+            <a:endParaRPr lang="en-US" sz="2800" dirty="0"/>
+          </a:p>
+        </p:txBody>
+      </p:sp>
+      <p:sp>
+        <p:nvSpPr>
+          <p:cNvPr id="6" name="TextBox 5">
+            <a:extLst>
+              <a:ext uri="{FF2B5EF4-FFF2-40B4-BE49-F238E27FC236}">
+                <a16:creationId xmlns:a16="http://schemas.microsoft.com/office/drawing/2014/main" id="{69A4CC29-5996-1049-88FB-C0E0C33B09BB}"/>
+              </a:ext>
+            </a:extLst>
+          </p:cNvPr>
+          <p:cNvSpPr txBox="1"/>
+          <p:nvPr/>
+        </p:nvSpPr>
+        <p:spPr>
+          <a:xfrm>
+            <a:off x="540328" y="1915226"/>
+            <a:ext cx="7606146" cy="2585323"/>
+          </a:xfrm>
+          <a:prstGeom prst="rect">
+            <a:avLst/>
+          </a:prstGeom>
+          <a:noFill/>
+        </p:spPr>
+        <p:txBody>
+          <a:bodyPr wrap="square" rtlCol="0">
+            <a:spAutoFit/>
+          </a:bodyPr>
+          <a:lstStyle/>
+          <a:p>
+            <a:r>
+              <a:rPr lang="en-US" sz="1800" dirty="0">
+                <a:solidFill>
+                  <a:srgbClr val="0070C0"/>
+                </a:solidFill>
+                <a:latin typeface="Menlo" panose="020B0609030804020204" pitchFamily="49" charset="0"/>
+                <a:ea typeface="Menlo" panose="020B0609030804020204" pitchFamily="49" charset="0"/>
+                <a:cs typeface="Menlo" panose="020B0609030804020204" pitchFamily="49" charset="0"/>
+              </a:rPr>
+              <a:t>counter=0</a:t>
+            </a:r>
+          </a:p>
+          <a:p>
+            <a:r>
+              <a:rPr lang="en-US" sz="1800" dirty="0">
+                <a:solidFill>
+                  <a:srgbClr val="0070C0"/>
+                </a:solidFill>
+                <a:latin typeface="Menlo" panose="020B0609030804020204" pitchFamily="49" charset="0"/>
+                <a:ea typeface="Menlo" panose="020B0609030804020204" pitchFamily="49" charset="0"/>
+                <a:cs typeface="Menlo" panose="020B0609030804020204" pitchFamily="49" charset="0"/>
+              </a:rPr>
+              <a:t>N=10000</a:t>
+            </a:r>
+          </a:p>
+          <a:p>
+            <a:endParaRPr lang="en-US" sz="1800" dirty="0">
+              <a:solidFill>
+                <a:srgbClr val="0070C0"/>
+              </a:solidFill>
+              <a:latin typeface="Menlo" panose="020B0609030804020204" pitchFamily="49" charset="0"/>
+              <a:ea typeface="Menlo" panose="020B0609030804020204" pitchFamily="49" charset="0"/>
+              <a:cs typeface="Menlo" panose="020B0609030804020204" pitchFamily="49" charset="0"/>
+            </a:endParaRPr>
+          </a:p>
+          <a:p>
+            <a:r>
+              <a:rPr lang="en-US" sz="1800" dirty="0">
+                <a:solidFill>
+                  <a:srgbClr val="0070C0"/>
+                </a:solidFill>
+                <a:latin typeface="Menlo" panose="020B0609030804020204" pitchFamily="49" charset="0"/>
+                <a:ea typeface="Menlo" panose="020B0609030804020204" pitchFamily="49" charset="0"/>
+                <a:cs typeface="Menlo" panose="020B0609030804020204" pitchFamily="49" charset="0"/>
+              </a:rPr>
+              <a:t>for ii in range(N):</a:t>
+            </a:r>
+          </a:p>
+          <a:p>
+            <a:r>
+              <a:rPr lang="en-US" sz="1800" dirty="0">
+                <a:solidFill>
+                  <a:srgbClr val="0070C0"/>
+                </a:solidFill>
+                <a:latin typeface="Menlo" panose="020B0609030804020204" pitchFamily="49" charset="0"/>
+                <a:ea typeface="Menlo" panose="020B0609030804020204" pitchFamily="49" charset="0"/>
+                <a:cs typeface="Menlo" panose="020B0609030804020204" pitchFamily="49" charset="0"/>
+              </a:rPr>
+              <a:t>    trials = </a:t>
+            </a:r>
+            <a:r>
+              <a:rPr lang="en-US" sz="1800" dirty="0" err="1">
+                <a:solidFill>
+                  <a:srgbClr val="0070C0"/>
+                </a:solidFill>
+                <a:latin typeface="Menlo" panose="020B0609030804020204" pitchFamily="49" charset="0"/>
+                <a:ea typeface="Menlo" panose="020B0609030804020204" pitchFamily="49" charset="0"/>
+                <a:cs typeface="Menlo" panose="020B0609030804020204" pitchFamily="49" charset="0"/>
+              </a:rPr>
+              <a:t>randint</a:t>
+            </a:r>
+            <a:r>
+              <a:rPr lang="en-US" sz="1800" dirty="0">
+                <a:solidFill>
+                  <a:srgbClr val="0070C0"/>
+                </a:solidFill>
+                <a:latin typeface="Menlo" panose="020B0609030804020204" pitchFamily="49" charset="0"/>
+                <a:ea typeface="Menlo" panose="020B0609030804020204" pitchFamily="49" charset="0"/>
+                <a:cs typeface="Menlo" panose="020B0609030804020204" pitchFamily="49" charset="0"/>
+              </a:rPr>
+              <a:t>(2, size=30) </a:t>
+            </a:r>
+            <a:r>
+              <a:rPr lang="en-US" sz="1800" dirty="0">
+                <a:solidFill>
+                  <a:srgbClr val="00B050"/>
+                </a:solidFill>
+                <a:latin typeface="Menlo" panose="020B0609030804020204" pitchFamily="49" charset="0"/>
+                <a:ea typeface="Menlo" panose="020B0609030804020204" pitchFamily="49" charset="0"/>
+                <a:cs typeface="Menlo" panose="020B0609030804020204" pitchFamily="49" charset="0"/>
+              </a:rPr>
+              <a:t># [0,1,1,...,0,1,0]</a:t>
+            </a:r>
+          </a:p>
+          <a:p>
+            <a:r>
+              <a:rPr lang="en-US" sz="1800" dirty="0">
+                <a:solidFill>
+                  <a:srgbClr val="0070C0"/>
+                </a:solidFill>
+                <a:latin typeface="Menlo" panose="020B0609030804020204" pitchFamily="49" charset="0"/>
+                <a:ea typeface="Menlo" panose="020B0609030804020204" pitchFamily="49" charset="0"/>
+                <a:cs typeface="Menlo" panose="020B0609030804020204" pitchFamily="49" charset="0"/>
+              </a:rPr>
+              <a:t>    if </a:t>
+            </a:r>
+            <a:r>
+              <a:rPr lang="en-US" sz="1800" dirty="0" err="1">
+                <a:solidFill>
+                  <a:srgbClr val="0070C0"/>
+                </a:solidFill>
+                <a:latin typeface="Menlo" panose="020B0609030804020204" pitchFamily="49" charset="0"/>
+                <a:ea typeface="Menlo" panose="020B0609030804020204" pitchFamily="49" charset="0"/>
+                <a:cs typeface="Menlo" panose="020B0609030804020204" pitchFamily="49" charset="0"/>
+              </a:rPr>
+              <a:t>trials.sum</a:t>
+            </a:r>
+            <a:r>
+              <a:rPr lang="en-US" sz="1800" dirty="0">
+                <a:solidFill>
+                  <a:srgbClr val="0070C0"/>
+                </a:solidFill>
+                <a:latin typeface="Menlo" panose="020B0609030804020204" pitchFamily="49" charset="0"/>
+                <a:ea typeface="Menlo" panose="020B0609030804020204" pitchFamily="49" charset="0"/>
+                <a:cs typeface="Menlo" panose="020B0609030804020204" pitchFamily="49" charset="0"/>
+              </a:rPr>
+              <a:t>() &gt;= 22:</a:t>
+            </a:r>
+          </a:p>
+          <a:p>
+            <a:r>
+              <a:rPr lang="en-US" sz="1800" dirty="0">
+                <a:solidFill>
+                  <a:srgbClr val="0070C0"/>
+                </a:solidFill>
+                <a:latin typeface="Menlo" panose="020B0609030804020204" pitchFamily="49" charset="0"/>
+                <a:ea typeface="Menlo" panose="020B0609030804020204" pitchFamily="49" charset="0"/>
+                <a:cs typeface="Menlo" panose="020B0609030804020204" pitchFamily="49" charset="0"/>
+              </a:rPr>
+              <a:t>        counter += 1</a:t>
+            </a:r>
+          </a:p>
+          <a:p>
+            <a:endParaRPr lang="en-US" sz="1800" dirty="0">
+              <a:solidFill>
+                <a:srgbClr val="0070C0"/>
+              </a:solidFill>
+              <a:latin typeface="Menlo" panose="020B0609030804020204" pitchFamily="49" charset="0"/>
+              <a:ea typeface="Menlo" panose="020B0609030804020204" pitchFamily="49" charset="0"/>
+              <a:cs typeface="Menlo" panose="020B0609030804020204" pitchFamily="49" charset="0"/>
+            </a:endParaRPr>
+          </a:p>
+          <a:p>
+            <a:r>
+              <a:rPr lang="en-US" sz="1800" dirty="0" err="1">
+                <a:solidFill>
+                  <a:srgbClr val="0070C0"/>
+                </a:solidFill>
+                <a:latin typeface="Menlo" panose="020B0609030804020204" pitchFamily="49" charset="0"/>
+                <a:ea typeface="Menlo" panose="020B0609030804020204" pitchFamily="49" charset="0"/>
+                <a:cs typeface="Menlo" panose="020B0609030804020204" pitchFamily="49" charset="0"/>
+              </a:rPr>
+              <a:t>P_val</a:t>
+            </a:r>
+            <a:r>
+              <a:rPr lang="en-US" sz="1800" dirty="0">
+                <a:solidFill>
+                  <a:srgbClr val="0070C0"/>
+                </a:solidFill>
+                <a:latin typeface="Menlo" panose="020B0609030804020204" pitchFamily="49" charset="0"/>
+                <a:ea typeface="Menlo" panose="020B0609030804020204" pitchFamily="49" charset="0"/>
+                <a:cs typeface="Menlo" panose="020B0609030804020204" pitchFamily="49" charset="0"/>
+              </a:rPr>
+              <a:t> = counter / N     </a:t>
+            </a:r>
+            <a:r>
+              <a:rPr lang="en-US" sz="1800" dirty="0">
+                <a:solidFill>
+                  <a:srgbClr val="00B050"/>
+                </a:solidFill>
+                <a:latin typeface="Menlo" panose="020B0609030804020204" pitchFamily="49" charset="0"/>
+                <a:ea typeface="Menlo" panose="020B0609030804020204" pitchFamily="49" charset="0"/>
+                <a:cs typeface="Menlo" panose="020B0609030804020204" pitchFamily="49" charset="0"/>
+              </a:rPr>
+              <a:t># 0.008</a:t>
+            </a:r>
+            <a:endParaRPr lang="en-US" sz="1800" dirty="0">
+              <a:solidFill>
+                <a:srgbClr val="0070C0"/>
+              </a:solidFill>
+              <a:latin typeface="Menlo" panose="020B0609030804020204" pitchFamily="49" charset="0"/>
+              <a:ea typeface="Menlo" panose="020B0609030804020204" pitchFamily="49" charset="0"/>
+              <a:cs typeface="Menlo" panose="020B0609030804020204" pitchFamily="49" charset="0"/>
+            </a:endParaRPr>
+          </a:p>
+        </p:txBody>
+      </p:sp>
+      <p:sp>
+        <p:nvSpPr>
+          <p:cNvPr id="7" name="TextBox 6">
+            <a:extLst>
+              <a:ext uri="{FF2B5EF4-FFF2-40B4-BE49-F238E27FC236}">
+                <a16:creationId xmlns:a16="http://schemas.microsoft.com/office/drawing/2014/main" id="{D779D573-A471-7F4C-9EA4-E6D2665D39E8}"/>
+              </a:ext>
+            </a:extLst>
+          </p:cNvPr>
+          <p:cNvSpPr txBox="1"/>
+          <p:nvPr/>
+        </p:nvSpPr>
+        <p:spPr>
+          <a:xfrm>
+            <a:off x="540327" y="872836"/>
+            <a:ext cx="6151418" cy="369332"/>
+          </a:xfrm>
+          <a:prstGeom prst="rect">
+            <a:avLst/>
+          </a:prstGeom>
+          <a:noFill/>
+        </p:spPr>
+        <p:txBody>
+          <a:bodyPr wrap="square" rtlCol="0">
+            <a:spAutoFit/>
+          </a:bodyPr>
+          <a:lstStyle/>
+          <a:p>
+            <a:r>
+              <a:rPr lang="en-US" sz="1800" dirty="0"/>
+              <a:t>What is p-value of getting 22 heads of 30 coin tosses.</a:t>
+            </a:r>
+          </a:p>
+        </p:txBody>
+      </p:sp>
+    </p:spTree>
+    <p:extLst>
+      <p:ext uri="{BB962C8B-B14F-4D97-AF65-F5344CB8AC3E}">
+        <p14:creationId xmlns:p14="http://schemas.microsoft.com/office/powerpoint/2010/main" val="812837714"/>
+      </p:ext>
+    </p:extLst>
+  </p:cSld>
+  <p:clrMapOvr>
+    <a:masterClrMapping/>
+  </p:clrMapOvr>
+</p:sld>
+</file>
+
+<file path=ppt/slides/slide6.xml><?xml version="1.0" encoding="utf-8"?>
 <p:sld xmlns:a="http://schemas.openxmlformats.org/drawingml/2006/main" xmlns:r="http://schemas.openxmlformats.org/officeDocument/2006/relationships" xmlns:p="http://schemas.openxmlformats.org/presentationml/2006/main">
   <p:cSld>
     <p:spTree>
@@ -23915,7 +25423,7 @@
 </p:sld>
 </file>
 
-<file path=ppt/slides/slide6.xml><?xml version="1.0" encoding="utf-8"?>
+<file path=ppt/slides/slide7.xml><?xml version="1.0" encoding="utf-8"?>
 <p:sld xmlns:a="http://schemas.openxmlformats.org/drawingml/2006/main" xmlns:r="http://schemas.openxmlformats.org/officeDocument/2006/relationships" xmlns:p="http://schemas.openxmlformats.org/presentationml/2006/main">
   <p:cSld>
     <p:spTree>
@@ -25592,7 +27100,7 @@
 </p:sld>
 </file>
 
-<file path=ppt/slides/slide7.xml><?xml version="1.0" encoding="utf-8"?>
+<file path=ppt/slides/slide8.xml><?xml version="1.0" encoding="utf-8"?>
 <p:sld xmlns:a="http://schemas.openxmlformats.org/drawingml/2006/main" xmlns:r="http://schemas.openxmlformats.org/officeDocument/2006/relationships" xmlns:p="http://schemas.openxmlformats.org/presentationml/2006/main">
   <p:cSld>
     <p:spTree>
@@ -26329,7 +27837,7 @@
 </p:sld>
 </file>
 
-<file path=ppt/slides/slide8.xml><?xml version="1.0" encoding="utf-8"?>
+<file path=ppt/slides/slide9.xml><?xml version="1.0" encoding="utf-8"?>
 <p:sld xmlns:a="http://schemas.openxmlformats.org/drawingml/2006/main" xmlns:r="http://schemas.openxmlformats.org/officeDocument/2006/relationships" xmlns:p="http://schemas.openxmlformats.org/presentationml/2006/main">
   <p:cSld>
     <p:spTree>
@@ -27268,1180 +28776,6 @@
     <p:extLst>
       <p:ext uri="{BB962C8B-B14F-4D97-AF65-F5344CB8AC3E}">
         <p14:creationId xmlns:p14="http://schemas.microsoft.com/office/powerpoint/2010/main" val="364448510"/>
-      </p:ext>
-    </p:extLst>
-  </p:cSld>
-  <p:clrMapOvr>
-    <a:masterClrMapping/>
-  </p:clrMapOvr>
-</p:sld>
-</file>
-
-<file path=ppt/slides/slide9.xml><?xml version="1.0" encoding="utf-8"?>
-<p:sld xmlns:a="http://schemas.openxmlformats.org/drawingml/2006/main" xmlns:r="http://schemas.openxmlformats.org/officeDocument/2006/relationships" xmlns:p="http://schemas.openxmlformats.org/presentationml/2006/main">
-  <p:cSld>
-    <p:spTree>
-      <p:nvGrpSpPr>
-        <p:cNvPr id="1" name=""/>
-        <p:cNvGrpSpPr/>
-        <p:nvPr/>
-      </p:nvGrpSpPr>
-      <p:grpSpPr>
-        <a:xfrm>
-          <a:off x="0" y="0"/>
-          <a:ext cx="0" cy="0"/>
-          <a:chOff x="0" y="0"/>
-          <a:chExt cx="0" cy="0"/>
-        </a:xfrm>
-      </p:grpSpPr>
-      <p:sp>
-        <p:nvSpPr>
-          <p:cNvPr id="4" name="Google Shape;130;p18">
-            <a:extLst>
-              <a:ext uri="{FF2B5EF4-FFF2-40B4-BE49-F238E27FC236}">
-                <a16:creationId xmlns:a16="http://schemas.microsoft.com/office/drawing/2014/main" id="{6F73DBF3-377D-DC49-AED2-EC061EC41127}"/>
-              </a:ext>
-            </a:extLst>
-          </p:cNvPr>
-          <p:cNvSpPr txBox="1"/>
-          <p:nvPr/>
-        </p:nvSpPr>
-        <p:spPr>
-          <a:xfrm>
-            <a:off x="0" y="57383"/>
-            <a:ext cx="5913120" cy="6800617"/>
-          </a:xfrm>
-          <a:prstGeom prst="rect">
-            <a:avLst/>
-          </a:prstGeom>
-          <a:noFill/>
-          <a:ln>
-            <a:noFill/>
-          </a:ln>
-        </p:spPr>
-        <p:txBody>
-          <a:bodyPr spcFirstLastPara="1" wrap="square" lIns="91425" tIns="91425" rIns="91425" bIns="91425" anchor="t" anchorCtr="0">
-            <a:noAutofit/>
-          </a:bodyPr>
-          <a:lstStyle/>
-          <a:p>
-            <a:r>
-              <a:rPr lang="en-US" sz="2800" b="1" dirty="0">
-                <a:latin typeface="Calibri"/>
-                <a:ea typeface="Calibri"/>
-                <a:cs typeface="Calibri"/>
-                <a:sym typeface="Calibri"/>
-              </a:rPr>
-              <a:t>Checking whether a coin is fair - t-test</a:t>
-            </a:r>
-            <a:br>
-              <a:rPr lang="en-US" sz="1800" dirty="0">
-                <a:latin typeface="Calibri"/>
-                <a:ea typeface="Calibri"/>
-                <a:cs typeface="Calibri"/>
-                <a:sym typeface="Calibri"/>
-              </a:rPr>
-            </a:br>
-            <a:endParaRPr lang="en-US" sz="900" dirty="0">
-              <a:latin typeface="Calibri"/>
-              <a:ea typeface="Calibri"/>
-              <a:cs typeface="Calibri"/>
-              <a:sym typeface="Calibri"/>
-            </a:endParaRPr>
-          </a:p>
-          <a:p>
-            <a:r>
-              <a:rPr lang="en-US" sz="1300" dirty="0">
-                <a:latin typeface="Calibri"/>
-                <a:cs typeface="Calibri"/>
-                <a:sym typeface="Calibri"/>
-              </a:rPr>
-              <a:t>I am not sure if the t-test can be used for coin flipping hypothesis testing.</a:t>
-            </a:r>
-          </a:p>
-          <a:p>
-            <a:endParaRPr lang="en-US" sz="800" dirty="0">
-              <a:latin typeface="Calibri"/>
-              <a:cs typeface="Calibri"/>
-              <a:sym typeface="Calibri"/>
-            </a:endParaRPr>
-          </a:p>
-          <a:p>
-            <a:r>
-              <a:rPr lang="en-US" sz="1300" dirty="0">
-                <a:latin typeface="Calibri"/>
-                <a:cs typeface="Calibri"/>
-                <a:sym typeface="Calibri"/>
-              </a:rPr>
-              <a:t>t-test is used for data which is presumed to have normal distribution, and only for small samples of data ( &lt; 30 points).</a:t>
-            </a:r>
-          </a:p>
-          <a:p>
-            <a:endParaRPr lang="en-US" sz="800" dirty="0">
-              <a:latin typeface="Calibri"/>
-              <a:cs typeface="Calibri"/>
-              <a:sym typeface="Calibri"/>
-            </a:endParaRPr>
-          </a:p>
-          <a:p>
-            <a:r>
-              <a:rPr lang="en-US" sz="1300" dirty="0">
-                <a:latin typeface="Calibri"/>
-                <a:cs typeface="Calibri"/>
-                <a:sym typeface="Calibri"/>
-              </a:rPr>
-              <a:t>But here is formal application of t-test:</a:t>
-            </a:r>
-          </a:p>
-          <a:p>
-            <a:endParaRPr lang="en-US" sz="800" dirty="0">
-              <a:latin typeface="Calibri"/>
-              <a:cs typeface="Calibri"/>
-              <a:sym typeface="Calibri"/>
-            </a:endParaRPr>
-          </a:p>
-          <a:p>
-            <a:r>
-              <a:rPr lang="en-US" sz="1300" b="1" u="sng" dirty="0">
-                <a:latin typeface="Calibri"/>
-                <a:ea typeface="Calibri"/>
-                <a:cs typeface="Calibri"/>
-                <a:sym typeface="Calibri"/>
-              </a:rPr>
-              <a:t>Problem:</a:t>
-            </a:r>
-            <a:endParaRPr sz="1300" b="1" u="sng" dirty="0">
-              <a:latin typeface="Calibri"/>
-              <a:ea typeface="Calibri"/>
-              <a:cs typeface="Calibri"/>
-              <a:sym typeface="Calibri"/>
-            </a:endParaRPr>
-          </a:p>
-          <a:p>
-            <a:pPr marL="0" lvl="0" indent="0" algn="l" rtl="0">
-              <a:spcBef>
-                <a:spcPts val="0"/>
-              </a:spcBef>
-              <a:spcAft>
-                <a:spcPts val="0"/>
-              </a:spcAft>
-              <a:buNone/>
-            </a:pPr>
-            <a:r>
-              <a:rPr lang="en-US" sz="1300" dirty="0">
-                <a:latin typeface="Calibri"/>
-                <a:ea typeface="Calibri"/>
-                <a:cs typeface="Calibri"/>
-                <a:sym typeface="Calibri"/>
-              </a:rPr>
-              <a:t>We want to test a null hypothesis that the coin is fair.</a:t>
-            </a:r>
-          </a:p>
-          <a:p>
-            <a:pPr marL="0" lvl="0" indent="0" algn="l" rtl="0">
-              <a:spcBef>
-                <a:spcPts val="0"/>
-              </a:spcBef>
-              <a:spcAft>
-                <a:spcPts val="0"/>
-              </a:spcAft>
-              <a:buNone/>
-            </a:pPr>
-            <a:r>
-              <a:rPr lang="en-US" sz="1300" dirty="0">
-                <a:latin typeface="Calibri"/>
-                <a:ea typeface="Calibri"/>
-                <a:cs typeface="Calibri"/>
-                <a:sym typeface="Calibri"/>
-              </a:rPr>
-              <a:t>We flip the coin N times and got H heads.</a:t>
-            </a:r>
-          </a:p>
-          <a:p>
-            <a:pPr marL="0" lvl="0" indent="0" algn="l" rtl="0">
-              <a:spcBef>
-                <a:spcPts val="0"/>
-              </a:spcBef>
-              <a:spcAft>
-                <a:spcPts val="0"/>
-              </a:spcAft>
-              <a:buNone/>
-            </a:pPr>
-            <a:r>
-              <a:rPr lang="en-US" sz="1300" dirty="0">
-                <a:latin typeface="Calibri"/>
-                <a:ea typeface="Calibri"/>
-                <a:cs typeface="Calibri"/>
-                <a:sym typeface="Calibri"/>
-              </a:rPr>
-              <a:t>So number of observed tails T = N-H.</a:t>
-            </a:r>
-          </a:p>
-          <a:p>
-            <a:pPr marL="0" lvl="0" indent="0" algn="l" rtl="0">
-              <a:spcBef>
-                <a:spcPts val="0"/>
-              </a:spcBef>
-              <a:spcAft>
-                <a:spcPts val="0"/>
-              </a:spcAft>
-              <a:buNone/>
-            </a:pPr>
-            <a:r>
-              <a:rPr lang="en-US" sz="1300" dirty="0">
-                <a:latin typeface="Calibri"/>
-                <a:ea typeface="Calibri"/>
-                <a:cs typeface="Calibri"/>
-                <a:sym typeface="Calibri"/>
-              </a:rPr>
-              <a:t>Expected numbers are N/2 for heads and for tails.</a:t>
-            </a:r>
-          </a:p>
-          <a:p>
-            <a:pPr marL="0" lvl="0" indent="0" algn="l" rtl="0">
-              <a:spcBef>
-                <a:spcPts val="0"/>
-              </a:spcBef>
-              <a:spcAft>
-                <a:spcPts val="0"/>
-              </a:spcAft>
-              <a:buNone/>
-            </a:pPr>
-            <a:endParaRPr lang="en-US" sz="800" dirty="0">
-              <a:latin typeface="Calibri"/>
-              <a:ea typeface="Calibri"/>
-              <a:cs typeface="Calibri"/>
-              <a:sym typeface="Calibri"/>
-            </a:endParaRPr>
-          </a:p>
-          <a:p>
-            <a:pPr marL="0" lvl="0" indent="0" algn="l" rtl="0">
-              <a:spcBef>
-                <a:spcPts val="0"/>
-              </a:spcBef>
-              <a:spcAft>
-                <a:spcPts val="0"/>
-              </a:spcAft>
-              <a:buNone/>
-            </a:pPr>
-            <a:r>
-              <a:rPr lang="en-US" sz="1300" dirty="0">
-                <a:latin typeface="Calibri"/>
-                <a:ea typeface="Calibri"/>
-                <a:cs typeface="Calibri"/>
-                <a:sym typeface="Calibri"/>
-              </a:rPr>
-              <a:t>To calculate t-test we assume values 1 for heads and -1 for tails.</a:t>
-            </a:r>
-          </a:p>
-          <a:p>
-            <a:pPr lvl="0"/>
-            <a:r>
-              <a:rPr lang="en-US" sz="1300" dirty="0">
-                <a:latin typeface="Calibri"/>
-                <a:ea typeface="Calibri"/>
-                <a:cs typeface="Calibri"/>
-                <a:sym typeface="Calibri"/>
-              </a:rPr>
-              <a:t>Then suppose N=100, H=60, T=40</a:t>
-            </a:r>
-          </a:p>
-          <a:p>
-            <a:pPr marL="0" lvl="0" indent="0" algn="l" rtl="0">
-              <a:spcBef>
-                <a:spcPts val="0"/>
-              </a:spcBef>
-              <a:spcAft>
-                <a:spcPts val="0"/>
-              </a:spcAft>
-              <a:buNone/>
-            </a:pPr>
-            <a:r>
-              <a:rPr lang="en-US" sz="1300" dirty="0">
-                <a:latin typeface="Calibri"/>
-                <a:ea typeface="Calibri"/>
-                <a:cs typeface="Calibri"/>
-                <a:sym typeface="Calibri"/>
-              </a:rPr>
-              <a:t>   Sample Mean X = (H – T)/100 = 20/100 = 0.2</a:t>
-            </a:r>
-          </a:p>
-          <a:p>
-            <a:pPr marL="0" lvl="0" indent="0" algn="l" rtl="0">
-              <a:spcBef>
-                <a:spcPts val="0"/>
-              </a:spcBef>
-              <a:spcAft>
-                <a:spcPts val="0"/>
-              </a:spcAft>
-              <a:buNone/>
-            </a:pPr>
-            <a:r>
-              <a:rPr lang="en-US" sz="1300" dirty="0">
-                <a:latin typeface="Calibri"/>
-                <a:ea typeface="Calibri"/>
-                <a:cs typeface="Calibri"/>
-                <a:sym typeface="Calibri"/>
-              </a:rPr>
-              <a:t>   Expected mean = N/2 – N/2 = 0</a:t>
-            </a:r>
-          </a:p>
-          <a:p>
-            <a:pPr marL="0" lvl="0" indent="0" algn="l" rtl="0">
-              <a:spcBef>
-                <a:spcPts val="0"/>
-              </a:spcBef>
-              <a:spcAft>
-                <a:spcPts val="0"/>
-              </a:spcAft>
-              <a:buNone/>
-            </a:pPr>
-            <a:r>
-              <a:rPr lang="en-US" sz="1300" dirty="0">
-                <a:latin typeface="Calibri"/>
-                <a:ea typeface="Calibri"/>
-                <a:cs typeface="Calibri"/>
-                <a:sym typeface="Calibri"/>
-              </a:rPr>
-              <a:t>   Degrees of Freedom = N-1 = 99</a:t>
-            </a:r>
-          </a:p>
-          <a:p>
-            <a:pPr marL="0" lvl="0" indent="0" algn="l" rtl="0">
-              <a:spcBef>
-                <a:spcPts val="0"/>
-              </a:spcBef>
-              <a:spcAft>
-                <a:spcPts val="0"/>
-              </a:spcAft>
-              <a:buNone/>
-            </a:pPr>
-            <a:r>
-              <a:rPr lang="en-US" sz="1300" dirty="0">
-                <a:latin typeface="Calibri"/>
-                <a:ea typeface="Calibri"/>
-                <a:cs typeface="Calibri"/>
-                <a:sym typeface="Calibri"/>
-              </a:rPr>
-              <a:t>   Sample Variance:</a:t>
-            </a:r>
-          </a:p>
-          <a:p>
-            <a:pPr lvl="0"/>
-            <a:r>
-              <a:rPr lang="en-US" sz="1300" dirty="0">
-                <a:latin typeface="Calibri"/>
-                <a:ea typeface="Calibri"/>
-                <a:cs typeface="Calibri"/>
-                <a:sym typeface="Calibri"/>
-              </a:rPr>
-              <a:t>         S</a:t>
-            </a:r>
-            <a:r>
-              <a:rPr lang="en-US" sz="1300" baseline="30000" dirty="0">
-                <a:latin typeface="Calibri"/>
-                <a:ea typeface="Calibri"/>
-                <a:cs typeface="Calibri"/>
-                <a:sym typeface="Calibri"/>
-              </a:rPr>
-              <a:t>2</a:t>
-            </a:r>
-            <a:r>
-              <a:rPr lang="en-US" sz="1300" dirty="0">
-                <a:latin typeface="Calibri"/>
-                <a:ea typeface="Calibri"/>
-                <a:cs typeface="Calibri"/>
-                <a:sym typeface="Calibri"/>
-              </a:rPr>
-              <a:t> = (1/99) *  ( 60*(1-0.2)</a:t>
-            </a:r>
-            <a:r>
-              <a:rPr lang="en-US" sz="1300" baseline="30000" dirty="0">
-                <a:latin typeface="Calibri"/>
-                <a:ea typeface="Calibri"/>
-                <a:cs typeface="Calibri"/>
-                <a:sym typeface="Calibri"/>
-              </a:rPr>
-              <a:t>2</a:t>
-            </a:r>
-            <a:r>
-              <a:rPr lang="en-US" sz="1300" dirty="0">
-                <a:latin typeface="Calibri"/>
-                <a:ea typeface="Calibri"/>
-                <a:cs typeface="Calibri"/>
-                <a:sym typeface="Calibri"/>
-              </a:rPr>
-              <a:t> + 40*(-1-0.2)</a:t>
-            </a:r>
-            <a:r>
-              <a:rPr lang="en-US" sz="1300" baseline="30000" dirty="0">
-                <a:latin typeface="Calibri"/>
-                <a:ea typeface="Calibri"/>
-                <a:cs typeface="Calibri"/>
-                <a:sym typeface="Calibri"/>
-              </a:rPr>
-              <a:t>2</a:t>
-            </a:r>
-            <a:r>
-              <a:rPr lang="en-US" sz="1300" dirty="0">
-                <a:latin typeface="Calibri"/>
-                <a:ea typeface="Calibri"/>
-                <a:cs typeface="Calibri"/>
-                <a:sym typeface="Calibri"/>
-              </a:rPr>
-              <a:t> )  = 0.969</a:t>
-            </a:r>
-          </a:p>
-          <a:p>
-            <a:pPr lvl="0"/>
-            <a:r>
-              <a:rPr lang="en-US" sz="1300" dirty="0">
-                <a:latin typeface="Calibri"/>
-                <a:ea typeface="Calibri"/>
-                <a:cs typeface="Calibri"/>
-                <a:sym typeface="Calibri"/>
-              </a:rPr>
-              <a:t>   Sample Standard Deviation:</a:t>
-            </a:r>
-          </a:p>
-          <a:p>
-            <a:pPr lvl="0"/>
-            <a:r>
-              <a:rPr lang="en-US" sz="1300" dirty="0">
-                <a:latin typeface="Calibri"/>
-                <a:ea typeface="Calibri"/>
-                <a:cs typeface="Calibri"/>
-                <a:sym typeface="Calibri"/>
-              </a:rPr>
-              <a:t>        S = sqrt(0.9696) = 0.9847</a:t>
-            </a:r>
-          </a:p>
-          <a:p>
-            <a:pPr lvl="0"/>
-            <a:r>
-              <a:rPr lang="en-US" sz="1300" dirty="0">
-                <a:latin typeface="Calibri"/>
-                <a:ea typeface="Calibri"/>
-                <a:cs typeface="Calibri"/>
-                <a:sym typeface="Calibri"/>
-              </a:rPr>
-              <a:t>   t-statistics:</a:t>
-            </a:r>
-          </a:p>
-          <a:p>
-            <a:pPr lvl="0"/>
-            <a:r>
-              <a:rPr lang="en-US" sz="1300" dirty="0">
-                <a:latin typeface="Calibri"/>
-                <a:ea typeface="Calibri"/>
-                <a:cs typeface="Calibri"/>
-                <a:sym typeface="Calibri"/>
-              </a:rPr>
-              <a:t>        (0.2– 0) / (0.9847 / 10) = 2.031</a:t>
-            </a:r>
-          </a:p>
-          <a:p>
-            <a:pPr lvl="0"/>
-            <a:endParaRPr lang="en-US" sz="1300" dirty="0">
-              <a:latin typeface="Calibri"/>
-              <a:ea typeface="Calibri"/>
-              <a:cs typeface="Calibri"/>
-              <a:sym typeface="Calibri"/>
-            </a:endParaRPr>
-          </a:p>
-          <a:p>
-            <a:pPr lvl="0"/>
-            <a:r>
-              <a:rPr lang="en-US" sz="1300" dirty="0">
-                <a:latin typeface="Calibri"/>
-                <a:ea typeface="Calibri"/>
-                <a:cs typeface="Calibri"/>
-                <a:sym typeface="Calibri"/>
-              </a:rPr>
-              <a:t>Note: for two-sided t-test with 100 degrees of freedom and P-value 0.05</a:t>
-            </a:r>
-          </a:p>
-          <a:p>
-            <a:pPr lvl="0"/>
-            <a:r>
-              <a:rPr lang="en-US" sz="1300" dirty="0">
-                <a:latin typeface="Calibri"/>
-                <a:ea typeface="Calibri"/>
-                <a:cs typeface="Calibri"/>
-                <a:sym typeface="Calibri"/>
-              </a:rPr>
-              <a:t>we have (from t-test table): 1.984</a:t>
-            </a:r>
-          </a:p>
-          <a:p>
-            <a:pPr lvl="0"/>
-            <a:r>
-              <a:rPr lang="en-US" sz="1300" dirty="0">
-                <a:latin typeface="Calibri"/>
-                <a:ea typeface="Calibri"/>
-                <a:cs typeface="Calibri"/>
-                <a:sym typeface="Calibri"/>
-              </a:rPr>
-              <a:t>Our t-statistics is 2.031, it is more extreme, so we reject the null hypothesis</a:t>
-            </a:r>
-          </a:p>
-          <a:p>
-            <a:pPr lvl="0"/>
-            <a:endParaRPr lang="en-US" sz="1300" dirty="0">
-              <a:latin typeface="Calibri"/>
-              <a:ea typeface="Calibri"/>
-              <a:cs typeface="Calibri"/>
-              <a:sym typeface="Calibri"/>
-            </a:endParaRPr>
-          </a:p>
-          <a:p>
-            <a:pPr lvl="0"/>
-            <a:r>
-              <a:rPr lang="en-US" sz="1300" dirty="0">
-                <a:latin typeface="Calibri"/>
-                <a:ea typeface="Calibri"/>
-                <a:cs typeface="Calibri"/>
-                <a:sym typeface="Calibri"/>
-              </a:rPr>
-              <a:t>In Python:</a:t>
-            </a:r>
-          </a:p>
-          <a:p>
-            <a:pPr lvl="0"/>
-            <a:r>
-              <a:rPr lang="en-US" sz="1100" dirty="0">
-                <a:solidFill>
-                  <a:srgbClr val="0070C0"/>
-                </a:solidFill>
-                <a:latin typeface="Menlo" panose="020B0609030804020204" pitchFamily="49" charset="0"/>
-                <a:ea typeface="Menlo" panose="020B0609030804020204" pitchFamily="49" charset="0"/>
-                <a:cs typeface="Menlo" panose="020B0609030804020204" pitchFamily="49" charset="0"/>
-                <a:sym typeface="Calibri"/>
-              </a:rPr>
-              <a:t>     from </a:t>
-            </a:r>
-            <a:r>
-              <a:rPr lang="en-US" sz="1100" dirty="0" err="1">
-                <a:solidFill>
-                  <a:srgbClr val="0070C0"/>
-                </a:solidFill>
-                <a:latin typeface="Menlo" panose="020B0609030804020204" pitchFamily="49" charset="0"/>
-                <a:ea typeface="Menlo" panose="020B0609030804020204" pitchFamily="49" charset="0"/>
-                <a:cs typeface="Menlo" panose="020B0609030804020204" pitchFamily="49" charset="0"/>
-                <a:sym typeface="Calibri"/>
-              </a:rPr>
-              <a:t>scipy</a:t>
-            </a:r>
-            <a:r>
-              <a:rPr lang="en-US" sz="1100" dirty="0">
-                <a:solidFill>
-                  <a:srgbClr val="0070C0"/>
-                </a:solidFill>
-                <a:latin typeface="Menlo" panose="020B0609030804020204" pitchFamily="49" charset="0"/>
-                <a:ea typeface="Menlo" panose="020B0609030804020204" pitchFamily="49" charset="0"/>
-                <a:cs typeface="Menlo" panose="020B0609030804020204" pitchFamily="49" charset="0"/>
-                <a:sym typeface="Calibri"/>
-              </a:rPr>
-              <a:t> import stats</a:t>
-            </a:r>
-          </a:p>
-          <a:p>
-            <a:pPr lvl="0"/>
-            <a:r>
-              <a:rPr lang="en-US" sz="1100" dirty="0">
-                <a:solidFill>
-                  <a:srgbClr val="0070C0"/>
-                </a:solidFill>
-                <a:latin typeface="Menlo" panose="020B0609030804020204" pitchFamily="49" charset="0"/>
-                <a:ea typeface="Menlo" panose="020B0609030804020204" pitchFamily="49" charset="0"/>
-                <a:cs typeface="Menlo" panose="020B0609030804020204" pitchFamily="49" charset="0"/>
-                <a:sym typeface="Calibri"/>
-              </a:rPr>
-              <a:t>     </a:t>
-            </a:r>
-            <a:r>
-              <a:rPr lang="en-US" sz="1100" dirty="0" err="1">
-                <a:solidFill>
-                  <a:srgbClr val="0070C0"/>
-                </a:solidFill>
-                <a:latin typeface="Menlo" panose="020B0609030804020204" pitchFamily="49" charset="0"/>
-                <a:ea typeface="Menlo" panose="020B0609030804020204" pitchFamily="49" charset="0"/>
-                <a:cs typeface="Menlo" panose="020B0609030804020204" pitchFamily="49" charset="0"/>
-                <a:sym typeface="Calibri"/>
-              </a:rPr>
-              <a:t>stats.t.cdf</a:t>
-            </a:r>
-            <a:r>
-              <a:rPr lang="en-US" sz="1100" dirty="0">
-                <a:solidFill>
-                  <a:srgbClr val="0070C0"/>
-                </a:solidFill>
-                <a:latin typeface="Menlo" panose="020B0609030804020204" pitchFamily="49" charset="0"/>
-                <a:ea typeface="Menlo" panose="020B0609030804020204" pitchFamily="49" charset="0"/>
-                <a:cs typeface="Menlo" panose="020B0609030804020204" pitchFamily="49" charset="0"/>
-                <a:sym typeface="Calibri"/>
-              </a:rPr>
-              <a:t>(2.031,df=99)    </a:t>
-            </a:r>
-            <a:r>
-              <a:rPr lang="en-US" sz="1100" dirty="0">
-                <a:solidFill>
-                  <a:srgbClr val="00B050"/>
-                </a:solidFill>
-                <a:latin typeface="Menlo" panose="020B0609030804020204" pitchFamily="49" charset="0"/>
-                <a:ea typeface="Menlo" panose="020B0609030804020204" pitchFamily="49" charset="0"/>
-                <a:cs typeface="Menlo" panose="020B0609030804020204" pitchFamily="49" charset="0"/>
-                <a:sym typeface="Calibri"/>
-              </a:rPr>
-              <a:t># 0.9775 , more extreme than 0.95</a:t>
-            </a:r>
-          </a:p>
-          <a:p>
-            <a:pPr lvl="0"/>
-            <a:endParaRPr lang="en-US" sz="1300" dirty="0">
-              <a:latin typeface="Calibri"/>
-              <a:ea typeface="Calibri"/>
-              <a:cs typeface="Calibri"/>
-              <a:sym typeface="Calibri"/>
-            </a:endParaRPr>
-          </a:p>
-          <a:p>
-            <a:pPr lvl="0"/>
-            <a:endParaRPr lang="en-US" sz="1300" dirty="0">
-              <a:latin typeface="Calibri"/>
-              <a:ea typeface="Calibri"/>
-              <a:cs typeface="Calibri"/>
-              <a:sym typeface="Calibri"/>
-            </a:endParaRPr>
-          </a:p>
-          <a:p>
-            <a:pPr lvl="0"/>
-            <a:endParaRPr lang="en-US" sz="1300" dirty="0">
-              <a:latin typeface="Calibri"/>
-              <a:ea typeface="Calibri"/>
-              <a:cs typeface="Calibri"/>
-              <a:sym typeface="Calibri"/>
-            </a:endParaRPr>
-          </a:p>
-          <a:p>
-            <a:pPr lvl="0"/>
-            <a:endParaRPr lang="en-US" sz="1300" dirty="0">
-              <a:latin typeface="Calibri"/>
-              <a:ea typeface="Calibri"/>
-              <a:cs typeface="Calibri"/>
-              <a:sym typeface="Calibri"/>
-            </a:endParaRPr>
-          </a:p>
-        </p:txBody>
-      </p:sp>
-      <p:pic>
-        <p:nvPicPr>
-          <p:cNvPr id="5" name="Picture 4">
-            <a:extLst>
-              <a:ext uri="{FF2B5EF4-FFF2-40B4-BE49-F238E27FC236}">
-                <a16:creationId xmlns:a16="http://schemas.microsoft.com/office/drawing/2014/main" id="{9CC5F72C-4AE0-DE4C-A88E-C5CDCB8F2FE7}"/>
-              </a:ext>
-            </a:extLst>
-          </p:cNvPr>
-          <p:cNvPicPr>
-            <a:picLocks noChangeAspect="1"/>
-          </p:cNvPicPr>
-          <p:nvPr/>
-        </p:nvPicPr>
-        <p:blipFill>
-          <a:blip r:embed="rId2" cstate="email">
-            <a:extLst>
-              <a:ext uri="{28A0092B-C50C-407E-A947-70E740481C1C}">
-                <a14:useLocalDpi xmlns:a14="http://schemas.microsoft.com/office/drawing/2010/main"/>
-              </a:ext>
-            </a:extLst>
-          </a:blip>
-          <a:stretch>
-            <a:fillRect/>
-          </a:stretch>
-        </p:blipFill>
-        <p:spPr>
-          <a:xfrm>
-            <a:off x="7122758" y="1496340"/>
-            <a:ext cx="1331161" cy="612140"/>
-          </a:xfrm>
-          <a:prstGeom prst="rect">
-            <a:avLst/>
-          </a:prstGeom>
-        </p:spPr>
-      </p:pic>
-      <p:pic>
-        <p:nvPicPr>
-          <p:cNvPr id="6" name="Picture 5">
-            <a:extLst>
-              <a:ext uri="{FF2B5EF4-FFF2-40B4-BE49-F238E27FC236}">
-                <a16:creationId xmlns:a16="http://schemas.microsoft.com/office/drawing/2014/main" id="{98E620A2-33F1-234A-BB97-467B69CD2327}"/>
-              </a:ext>
-            </a:extLst>
-          </p:cNvPr>
-          <p:cNvPicPr>
-            <a:picLocks noChangeAspect="1"/>
-          </p:cNvPicPr>
-          <p:nvPr/>
-        </p:nvPicPr>
-        <p:blipFill>
-          <a:blip r:embed="rId3" cstate="email">
-            <a:extLst>
-              <a:ext uri="{28A0092B-C50C-407E-A947-70E740481C1C}">
-                <a14:useLocalDpi xmlns:a14="http://schemas.microsoft.com/office/drawing/2010/main"/>
-              </a:ext>
-            </a:extLst>
-          </a:blip>
-          <a:stretch>
-            <a:fillRect/>
-          </a:stretch>
-        </p:blipFill>
-        <p:spPr>
-          <a:xfrm>
-            <a:off x="7122758" y="2148781"/>
-            <a:ext cx="2377908" cy="613968"/>
-          </a:xfrm>
-          <a:prstGeom prst="rect">
-            <a:avLst/>
-          </a:prstGeom>
-        </p:spPr>
-      </p:pic>
-      <p:pic>
-        <p:nvPicPr>
-          <p:cNvPr id="7" name="Picture 6">
-            <a:extLst>
-              <a:ext uri="{FF2B5EF4-FFF2-40B4-BE49-F238E27FC236}">
-                <a16:creationId xmlns:a16="http://schemas.microsoft.com/office/drawing/2014/main" id="{699F40AF-8B1F-4B4C-AB25-DBEF1CC15EB6}"/>
-              </a:ext>
-            </a:extLst>
-          </p:cNvPr>
-          <p:cNvPicPr>
-            <a:picLocks noChangeAspect="1"/>
-          </p:cNvPicPr>
-          <p:nvPr/>
-        </p:nvPicPr>
-        <p:blipFill>
-          <a:blip r:embed="rId4" cstate="email">
-            <a:extLst>
-              <a:ext uri="{28A0092B-C50C-407E-A947-70E740481C1C}">
-                <a14:useLocalDpi xmlns:a14="http://schemas.microsoft.com/office/drawing/2010/main"/>
-              </a:ext>
-            </a:extLst>
-          </a:blip>
-          <a:stretch>
-            <a:fillRect/>
-          </a:stretch>
-        </p:blipFill>
-        <p:spPr>
-          <a:xfrm>
-            <a:off x="7038703" y="3002765"/>
-            <a:ext cx="702080" cy="616692"/>
-          </a:xfrm>
-          <a:prstGeom prst="rect">
-            <a:avLst/>
-          </a:prstGeom>
-        </p:spPr>
-      </p:pic>
-      <p:pic>
-        <p:nvPicPr>
-          <p:cNvPr id="8" name="Picture 7">
-            <a:extLst>
-              <a:ext uri="{FF2B5EF4-FFF2-40B4-BE49-F238E27FC236}">
-                <a16:creationId xmlns:a16="http://schemas.microsoft.com/office/drawing/2014/main" id="{C8597561-A772-964F-AE93-9F1DCADF39F8}"/>
-              </a:ext>
-            </a:extLst>
-          </p:cNvPr>
-          <p:cNvPicPr>
-            <a:picLocks noChangeAspect="1"/>
-          </p:cNvPicPr>
-          <p:nvPr/>
-        </p:nvPicPr>
-        <p:blipFill>
-          <a:blip r:embed="rId5" cstate="email">
-            <a:extLst>
-              <a:ext uri="{28A0092B-C50C-407E-A947-70E740481C1C}">
-                <a14:useLocalDpi xmlns:a14="http://schemas.microsoft.com/office/drawing/2010/main"/>
-              </a:ext>
-            </a:extLst>
-          </a:blip>
-          <a:stretch>
-            <a:fillRect/>
-          </a:stretch>
-        </p:blipFill>
-        <p:spPr>
-          <a:xfrm>
-            <a:off x="7038703" y="3859473"/>
-            <a:ext cx="582886" cy="565991"/>
-          </a:xfrm>
-          <a:prstGeom prst="rect">
-            <a:avLst/>
-          </a:prstGeom>
-        </p:spPr>
-      </p:pic>
-      <p:sp>
-        <p:nvSpPr>
-          <p:cNvPr id="9" name="TextBox 8">
-            <a:extLst>
-              <a:ext uri="{FF2B5EF4-FFF2-40B4-BE49-F238E27FC236}">
-                <a16:creationId xmlns:a16="http://schemas.microsoft.com/office/drawing/2014/main" id="{FE5ECE04-FB56-A541-ADF8-EC1AB9C8DCDC}"/>
-              </a:ext>
-            </a:extLst>
-          </p:cNvPr>
-          <p:cNvSpPr txBox="1"/>
-          <p:nvPr/>
-        </p:nvSpPr>
-        <p:spPr>
-          <a:xfrm>
-            <a:off x="6772928" y="237877"/>
-            <a:ext cx="5318760" cy="1046440"/>
-          </a:xfrm>
-          <a:prstGeom prst="rect">
-            <a:avLst/>
-          </a:prstGeom>
-          <a:noFill/>
-        </p:spPr>
-        <p:txBody>
-          <a:bodyPr wrap="square" rtlCol="0">
-            <a:spAutoFit/>
-          </a:bodyPr>
-          <a:lstStyle/>
-          <a:p>
-            <a:r>
-              <a:rPr lang="en-US" sz="2000" b="1" dirty="0"/>
-              <a:t>Student t-test</a:t>
-            </a:r>
-          </a:p>
-          <a:p>
-            <a:endParaRPr lang="en-US" dirty="0"/>
-          </a:p>
-          <a:p>
-            <a:r>
-              <a:rPr lang="en-US" dirty="0"/>
-              <a:t>Let X</a:t>
-            </a:r>
-            <a:r>
-              <a:rPr lang="en-US" baseline="-25000" dirty="0"/>
-              <a:t>i</a:t>
-            </a:r>
-            <a:r>
-              <a:rPr lang="en-US" dirty="0"/>
-              <a:t> be independently and identically drawn from the normal distribution with expected mean value</a:t>
-            </a:r>
-            <a:r>
-              <a:rPr lang="el-GR" dirty="0"/>
-              <a:t> </a:t>
-            </a:r>
-            <a:r>
-              <a:rPr lang="el-GR" b="1" dirty="0">
-                <a:solidFill>
-                  <a:srgbClr val="0070C0"/>
-                </a:solidFill>
-              </a:rPr>
-              <a:t>μ</a:t>
-            </a:r>
-            <a:r>
-              <a:rPr lang="en-US" dirty="0"/>
-              <a:t> and variance </a:t>
-            </a:r>
-            <a:r>
-              <a:rPr lang="el-GR" b="1" dirty="0">
-                <a:solidFill>
-                  <a:srgbClr val="0070C0"/>
-                </a:solidFill>
-              </a:rPr>
-              <a:t>σ</a:t>
-            </a:r>
-            <a:r>
-              <a:rPr lang="en-US" b="1" baseline="30000" dirty="0">
-                <a:solidFill>
-                  <a:srgbClr val="0070C0"/>
-                </a:solidFill>
-              </a:rPr>
-              <a:t>2</a:t>
-            </a:r>
-            <a:r>
-              <a:rPr lang="en-US" baseline="30000" dirty="0"/>
-              <a:t>  </a:t>
-            </a:r>
-            <a:endParaRPr lang="en-US" dirty="0"/>
-          </a:p>
-        </p:txBody>
-      </p:sp>
-      <p:sp>
-        <p:nvSpPr>
-          <p:cNvPr id="10" name="TextBox 9">
-            <a:extLst>
-              <a:ext uri="{FF2B5EF4-FFF2-40B4-BE49-F238E27FC236}">
-                <a16:creationId xmlns:a16="http://schemas.microsoft.com/office/drawing/2014/main" id="{C2DB4341-286D-CD45-99E7-42A3FF1B137F}"/>
-              </a:ext>
-            </a:extLst>
-          </p:cNvPr>
-          <p:cNvSpPr txBox="1"/>
-          <p:nvPr/>
-        </p:nvSpPr>
-        <p:spPr>
-          <a:xfrm>
-            <a:off x="9580958" y="1639127"/>
-            <a:ext cx="1214439" cy="523220"/>
-          </a:xfrm>
-          <a:prstGeom prst="rect">
-            <a:avLst/>
-          </a:prstGeom>
-          <a:noFill/>
-        </p:spPr>
-        <p:txBody>
-          <a:bodyPr wrap="square" rtlCol="0">
-            <a:spAutoFit/>
-          </a:bodyPr>
-          <a:lstStyle/>
-          <a:p>
-            <a:r>
-              <a:rPr lang="en-US" dirty="0"/>
-              <a:t>----- Sample </a:t>
-            </a:r>
-          </a:p>
-          <a:p>
-            <a:r>
-              <a:rPr lang="en-US" dirty="0"/>
-              <a:t>       mean</a:t>
-            </a:r>
-          </a:p>
-        </p:txBody>
-      </p:sp>
-      <p:sp>
-        <p:nvSpPr>
-          <p:cNvPr id="11" name="TextBox 10">
-            <a:extLst>
-              <a:ext uri="{FF2B5EF4-FFF2-40B4-BE49-F238E27FC236}">
-                <a16:creationId xmlns:a16="http://schemas.microsoft.com/office/drawing/2014/main" id="{8A5616D2-AC16-E540-AFEE-40C460596FA8}"/>
-              </a:ext>
-            </a:extLst>
-          </p:cNvPr>
-          <p:cNvSpPr txBox="1"/>
-          <p:nvPr/>
-        </p:nvSpPr>
-        <p:spPr>
-          <a:xfrm>
-            <a:off x="9580958" y="2244285"/>
-            <a:ext cx="1406529" cy="523220"/>
-          </a:xfrm>
-          <a:prstGeom prst="rect">
-            <a:avLst/>
-          </a:prstGeom>
-          <a:noFill/>
-        </p:spPr>
-        <p:txBody>
-          <a:bodyPr wrap="square" rtlCol="0">
-            <a:spAutoFit/>
-          </a:bodyPr>
-          <a:lstStyle/>
-          <a:p>
-            <a:r>
-              <a:rPr lang="en-US" dirty="0"/>
-              <a:t>----- Sample </a:t>
-            </a:r>
-          </a:p>
-          <a:p>
-            <a:r>
-              <a:rPr lang="en-US" dirty="0"/>
-              <a:t>       variance</a:t>
-            </a:r>
-          </a:p>
-        </p:txBody>
-      </p:sp>
-      <p:sp>
-        <p:nvSpPr>
-          <p:cNvPr id="12" name="TextBox 11">
-            <a:extLst>
-              <a:ext uri="{FF2B5EF4-FFF2-40B4-BE49-F238E27FC236}">
-                <a16:creationId xmlns:a16="http://schemas.microsoft.com/office/drawing/2014/main" id="{9545AB33-AA63-984A-9B99-9845844D5CB7}"/>
-              </a:ext>
-            </a:extLst>
-          </p:cNvPr>
-          <p:cNvSpPr txBox="1"/>
-          <p:nvPr/>
-        </p:nvSpPr>
-        <p:spPr>
-          <a:xfrm>
-            <a:off x="8044844" y="3152313"/>
-            <a:ext cx="2143280" cy="523220"/>
-          </a:xfrm>
-          <a:prstGeom prst="rect">
-            <a:avLst/>
-          </a:prstGeom>
-          <a:noFill/>
-        </p:spPr>
-        <p:txBody>
-          <a:bodyPr wrap="square" rtlCol="0">
-            <a:spAutoFit/>
-          </a:bodyPr>
-          <a:lstStyle/>
-          <a:p>
-            <a:r>
-              <a:rPr lang="en-US" dirty="0"/>
-              <a:t>Random variable, </a:t>
-            </a:r>
-          </a:p>
-          <a:p>
-            <a:r>
-              <a:rPr lang="en-US" dirty="0"/>
-              <a:t>Normal distribution</a:t>
-            </a:r>
-          </a:p>
-        </p:txBody>
-      </p:sp>
-      <p:sp>
-        <p:nvSpPr>
-          <p:cNvPr id="13" name="TextBox 12">
-            <a:extLst>
-              <a:ext uri="{FF2B5EF4-FFF2-40B4-BE49-F238E27FC236}">
-                <a16:creationId xmlns:a16="http://schemas.microsoft.com/office/drawing/2014/main" id="{734ABCDE-E2E0-1C44-A086-B8E907EF2E67}"/>
-              </a:ext>
-            </a:extLst>
-          </p:cNvPr>
-          <p:cNvSpPr txBox="1"/>
-          <p:nvPr/>
-        </p:nvSpPr>
-        <p:spPr>
-          <a:xfrm>
-            <a:off x="8044845" y="3968158"/>
-            <a:ext cx="3757284" cy="1169551"/>
-          </a:xfrm>
-          <a:prstGeom prst="rect">
-            <a:avLst/>
-          </a:prstGeom>
-          <a:noFill/>
-        </p:spPr>
-        <p:txBody>
-          <a:bodyPr wrap="square" rtlCol="0">
-            <a:spAutoFit/>
-          </a:bodyPr>
-          <a:lstStyle/>
-          <a:p>
-            <a:r>
-              <a:rPr lang="en-US" dirty="0"/>
-              <a:t>Random variable, </a:t>
-            </a:r>
-            <a:r>
-              <a:rPr lang="en-US" b="1" dirty="0">
-                <a:solidFill>
-                  <a:srgbClr val="0070C0"/>
-                </a:solidFill>
-              </a:rPr>
-              <a:t>t-distribution</a:t>
-            </a:r>
-            <a:r>
-              <a:rPr lang="en-US" dirty="0"/>
-              <a:t>. </a:t>
-            </a:r>
-          </a:p>
-          <a:p>
-            <a:r>
-              <a:rPr lang="en-US" dirty="0"/>
-              <a:t>It uses S = sqrt(sample variance) because real sigma is unknown. This creates </a:t>
-            </a:r>
-            <a:r>
-              <a:rPr lang="en-US" b="1" dirty="0">
-                <a:solidFill>
-                  <a:srgbClr val="0070C0"/>
-                </a:solidFill>
-              </a:rPr>
-              <a:t>uncertainty</a:t>
-            </a:r>
-            <a:r>
-              <a:rPr lang="en-US" dirty="0"/>
-              <a:t> – and leads to the "</a:t>
-            </a:r>
-            <a:r>
-              <a:rPr lang="en-US" b="1" dirty="0">
-                <a:solidFill>
-                  <a:srgbClr val="0070C0"/>
-                </a:solidFill>
-              </a:rPr>
-              <a:t>fat tails</a:t>
-            </a:r>
-            <a:r>
-              <a:rPr lang="en-US" dirty="0"/>
-              <a:t>" in the t-distribution.</a:t>
-            </a:r>
-          </a:p>
-        </p:txBody>
-      </p:sp>
-      <p:pic>
-        <p:nvPicPr>
-          <p:cNvPr id="16" name="Picture 15">
-            <a:extLst>
-              <a:ext uri="{FF2B5EF4-FFF2-40B4-BE49-F238E27FC236}">
-                <a16:creationId xmlns:a16="http://schemas.microsoft.com/office/drawing/2014/main" id="{731C3EEC-3D2B-4D4C-B8D3-B3908EED7EA1}"/>
-              </a:ext>
-            </a:extLst>
-          </p:cNvPr>
-          <p:cNvPicPr>
-            <a:picLocks noChangeAspect="1"/>
-          </p:cNvPicPr>
-          <p:nvPr/>
-        </p:nvPicPr>
-        <p:blipFill rotWithShape="1">
-          <a:blip r:embed="rId6" cstate="email">
-            <a:extLst>
-              <a:ext uri="{28A0092B-C50C-407E-A947-70E740481C1C}">
-                <a14:useLocalDpi xmlns:a14="http://schemas.microsoft.com/office/drawing/2010/main"/>
-              </a:ext>
-            </a:extLst>
-          </a:blip>
-          <a:srcRect/>
-          <a:stretch/>
-        </p:blipFill>
-        <p:spPr>
-          <a:xfrm>
-            <a:off x="6584085" y="5246893"/>
-            <a:ext cx="5384771" cy="1408156"/>
-          </a:xfrm>
-          <a:prstGeom prst="rect">
-            <a:avLst/>
-          </a:prstGeom>
-        </p:spPr>
-      </p:pic>
-      <p:cxnSp>
-        <p:nvCxnSpPr>
-          <p:cNvPr id="3" name="Straight Connector 2">
-            <a:extLst>
-              <a:ext uri="{FF2B5EF4-FFF2-40B4-BE49-F238E27FC236}">
-                <a16:creationId xmlns:a16="http://schemas.microsoft.com/office/drawing/2014/main" id="{D1C0BEE1-1D4E-454C-B8BD-7721E20060BB}"/>
-              </a:ext>
-            </a:extLst>
-          </p:cNvPr>
-          <p:cNvCxnSpPr/>
-          <p:nvPr/>
-        </p:nvCxnSpPr>
-        <p:spPr>
-          <a:xfrm>
-            <a:off x="6291620" y="237877"/>
-            <a:ext cx="0" cy="6463174"/>
-          </a:xfrm>
-          <a:prstGeom prst="line">
-            <a:avLst/>
-          </a:prstGeom>
-        </p:spPr>
-        <p:style>
-          <a:lnRef idx="1">
-            <a:schemeClr val="accent1"/>
-          </a:lnRef>
-          <a:fillRef idx="0">
-            <a:schemeClr val="accent1"/>
-          </a:fillRef>
-          <a:effectRef idx="0">
-            <a:schemeClr val="accent1"/>
-          </a:effectRef>
-          <a:fontRef idx="minor">
-            <a:schemeClr val="tx1"/>
-          </a:fontRef>
-        </p:style>
-      </p:cxnSp>
-    </p:spTree>
-    <p:extLst>
-      <p:ext uri="{BB962C8B-B14F-4D97-AF65-F5344CB8AC3E}">
-        <p14:creationId xmlns:p14="http://schemas.microsoft.com/office/powerpoint/2010/main" val="3379995339"/>
       </p:ext>
     </p:extLst>
   </p:cSld>
